--- a/presentations/project_pitch.pptx
+++ b/presentations/project_pitch.pptx
@@ -4,17 +4,17 @@
   <p:sldMasterIdLst>
     <p:sldMasterId id="2147483648" r:id="rId1"/>
   </p:sldMasterIdLst>
+  <p:notesMasterIdLst>
+    <p:notesMasterId r:id="rId6"/>
+  </p:notesMasterIdLst>
   <p:sldIdLst>
     <p:sldId id="256" r:id="rId2"/>
     <p:sldId id="257" r:id="rId3"/>
     <p:sldId id="258" r:id="rId4"/>
     <p:sldId id="259" r:id="rId5"/>
   </p:sldIdLst>
-  <p:notesMasterIdLst>
-    <p:notesMasterId r:id="rId6"/>
-  </p:notesMasterIdLst>
-  <p:sldSz cx="12191695" cy="6858000"/>
-  <p:notesSz cx="6858000" cy="12191695"/>
+  <p:sldSz cx="12192000" cy="6858000"/>
+  <p:notesSz cx="6858000" cy="12192000"/>
   <p:defaultTextStyle>
     <a:lvl1pPr marL="0" algn="l" defTabSz="914400" rtl="0" eaLnBrk="1" latinLnBrk="0" hangingPunct="1">
       <a:defRPr sz="1800" kern="1200">
@@ -107,6 +107,11 @@
       </a:defRPr>
     </a:lvl9pPr>
   </p:defaultTextStyle>
+  <p:extLst>
+    <p:ext uri="{EFAFB233-063F-42B5-8137-9DF3F51BA10A}">
+      <p15:sldGuideLst xmlns:p15="http://schemas.microsoft.com/office/powerpoint/2012/main"/>
+    </p:ext>
+  </p:extLst>
 </p:presentation>
 </file>
 
@@ -132,234 +137,10 @@
           <a:chExt cx="0" cy="0"/>
         </a:xfrm>
       </p:grpSpPr>
-      <p:sp>
-        <p:nvSpPr>
-          <p:cNvPr id="2" name="Header Placeholder 1"/>
-          <p:cNvSpPr>
-            <a:spLocks noGrp="1"/>
-          </p:cNvSpPr>
-          <p:nvPr>
-            <p:ph type="hdr" sz="quarter"/>
-          </p:nvPr>
-        </p:nvSpPr>
-        <p:spPr>
-          <a:xfrm>
-            <a:off x="0" y="0"/>
-            <a:ext cx="2971800" cy="458788"/>
-          </a:xfrm>
-          <a:prstGeom prst="rect">
-            <a:avLst/>
-          </a:prstGeom>
-        </p:spPr>
-        <p:txBody>
-          <a:bodyPr vert="horz" lIns="91440" tIns="45720" rIns="91440" bIns="45720" rtlCol="0"/>
-          <a:lstStyle>
-            <a:lvl1pPr algn="l">
-              <a:defRPr sz="1200"/>
-            </a:lvl1pPr>
-          </a:lstStyle>
-          <a:p>
-            <a:endParaRPr lang="en-US"/>
-          </a:p>
-        </p:txBody>
-      </p:sp>
-      <p:sp>
-        <p:nvSpPr>
-          <p:cNvPr id="3" name="Date Placeholder 2"/>
-          <p:cNvSpPr>
-            <a:spLocks noGrp="1"/>
-          </p:cNvSpPr>
-          <p:nvPr>
-            <p:ph type="dt" idx="1"/>
-          </p:nvPr>
-        </p:nvSpPr>
-        <p:spPr>
-          <a:xfrm>
-            <a:off x="3884613" y="0"/>
-            <a:ext cx="2971800" cy="458788"/>
-          </a:xfrm>
-          <a:prstGeom prst="rect">
-            <a:avLst/>
-          </a:prstGeom>
-        </p:spPr>
-        <p:txBody>
-          <a:bodyPr vert="horz" lIns="91440" tIns="45720" rIns="91440" bIns="45720" rtlCol="0"/>
-          <a:lstStyle>
-            <a:lvl1pPr algn="r">
-              <a:defRPr sz="1200"/>
-            </a:lvl1pPr>
-          </a:lstStyle>
-          <a:p>
-            <a:fld id="{5282F153-3F37-0F45-9E97-73ACFA13230C}" type="datetimeFigureOut">
-              <a:rPr lang="en-US"/>
-              <a:t>7/23/19</a:t>
-            </a:fld>
-            <a:endParaRPr lang="en-US"/>
-          </a:p>
-        </p:txBody>
-      </p:sp>
-      <p:sp>
-        <p:nvSpPr>
-          <p:cNvPr id="4" name="Slide Image Placeholder 3"/>
-          <p:cNvSpPr>
-            <a:spLocks noGrp="1" noRot="1" noChangeAspect="1"/>
-          </p:cNvSpPr>
-          <p:nvPr>
-            <p:ph type="sldImg" idx="2"/>
-          </p:nvPr>
-        </p:nvSpPr>
-        <p:spPr>
-          <a:xfrm>
-            <a:off x="685800" y="1143000"/>
-            <a:ext cx="5486400" cy="3086100"/>
-          </a:xfrm>
-          <a:prstGeom prst="rect">
-            <a:avLst/>
-          </a:prstGeom>
-          <a:noFill/>
-          <a:ln w="12700">
-            <a:solidFill>
-              <a:prstClr val="black"/>
-            </a:solidFill>
-          </a:ln>
-        </p:spPr>
-        <p:txBody>
-          <a:bodyPr vert="horz" lIns="91440" tIns="45720" rIns="91440" bIns="45720" rtlCol="0" anchor="ctr"/>
-          <a:lstStyle/>
-          <a:p>
-            <a:endParaRPr lang="en-US"/>
-          </a:p>
-        </p:txBody>
-      </p:sp>
-      <p:sp>
-        <p:nvSpPr>
-          <p:cNvPr id="5" name="Notes Placeholder 4"/>
-          <p:cNvSpPr>
-            <a:spLocks noGrp="1"/>
-          </p:cNvSpPr>
-          <p:nvPr>
-            <p:ph type="body" sz="quarter" idx="3"/>
-          </p:nvPr>
-        </p:nvSpPr>
-        <p:spPr>
-          <a:xfrm>
-            <a:off x="685800" y="4400550"/>
-            <a:ext cx="5486400" cy="3600450"/>
-          </a:xfrm>
-          <a:prstGeom prst="rect">
-            <a:avLst/>
-          </a:prstGeom>
-        </p:spPr>
-        <p:txBody>
-          <a:bodyPr vert="horz" lIns="91440" tIns="45720" rIns="91440" bIns="45720" rtlCol="0"/>
-          <a:lstStyle/>
-          <a:p>
-            <a:pPr lvl="0"/>
-            <a:r>
-              <a:rPr lang="en-US"/>
-              <a:t>Click to edit Master text styles</a:t>
-            </a:r>
-          </a:p>
-          <a:p>
-            <a:pPr lvl="1"/>
-            <a:r>
-              <a:rPr lang="en-US"/>
-              <a:t>Second level</a:t>
-            </a:r>
-          </a:p>
-          <a:p>
-            <a:pPr lvl="2"/>
-            <a:r>
-              <a:rPr lang="en-US"/>
-              <a:t>Third level</a:t>
-            </a:r>
-          </a:p>
-          <a:p>
-            <a:pPr lvl="3"/>
-            <a:r>
-              <a:rPr lang="en-US"/>
-              <a:t>Fourth level</a:t>
-            </a:r>
-          </a:p>
-          <a:p>
-            <a:pPr lvl="4"/>
-            <a:r>
-              <a:rPr lang="en-US"/>
-              <a:t>Fifth level</a:t>
-            </a:r>
-          </a:p>
-        </p:txBody>
-      </p:sp>
-      <p:sp>
-        <p:nvSpPr>
-          <p:cNvPr id="6" name="Footer Placeholder 5"/>
-          <p:cNvSpPr>
-            <a:spLocks noGrp="1"/>
-          </p:cNvSpPr>
-          <p:nvPr>
-            <p:ph type="ftr" sz="quarter" idx="4"/>
-          </p:nvPr>
-        </p:nvSpPr>
-        <p:spPr>
-          <a:xfrm>
-            <a:off x="0" y="8685213"/>
-            <a:ext cx="2971800" cy="458787"/>
-          </a:xfrm>
-          <a:prstGeom prst="rect">
-            <a:avLst/>
-          </a:prstGeom>
-        </p:spPr>
-        <p:txBody>
-          <a:bodyPr vert="horz" lIns="91440" tIns="45720" rIns="91440" bIns="45720" rtlCol="0" anchor="b"/>
-          <a:lstStyle>
-            <a:lvl1pPr algn="l">
-              <a:defRPr sz="1200"/>
-            </a:lvl1pPr>
-          </a:lstStyle>
-          <a:p>
-            <a:endParaRPr lang="en-US"/>
-          </a:p>
-        </p:txBody>
-      </p:sp>
-      <p:sp>
-        <p:nvSpPr>
-          <p:cNvPr id="7" name="Slide Number Placeholder 6"/>
-          <p:cNvSpPr>
-            <a:spLocks noGrp="1"/>
-          </p:cNvSpPr>
-          <p:nvPr>
-            <p:ph type="sldNum" sz="quarter" idx="5"/>
-          </p:nvPr>
-        </p:nvSpPr>
-        <p:spPr>
-          <a:xfrm>
-            <a:off x="3884613" y="8685213"/>
-            <a:ext cx="2971800" cy="458787"/>
-          </a:xfrm>
-          <a:prstGeom prst="rect">
-            <a:avLst/>
-          </a:prstGeom>
-        </p:spPr>
-        <p:txBody>
-          <a:bodyPr vert="horz" lIns="91440" tIns="45720" rIns="91440" bIns="45720" rtlCol="0" anchor="b"/>
-          <a:lstStyle>
-            <a:lvl1pPr algn="r">
-              <a:defRPr sz="1200"/>
-            </a:lvl1pPr>
-          </a:lstStyle>
-          <a:p>
-            <a:fld id="{CE5E9CC1-C706-0F49-92D6-E571CC5EEA8F}" type="slidenum">
-              <a:rPr lang="en-US"/>
-              <a:t>‹#›</a:t>
-            </a:fld>
-            <a:endParaRPr lang="en-US"/>
-          </a:p>
-        </p:txBody>
-      </p:sp>
     </p:spTree>
     <p:extLst>
       <p:ext uri="{BB962C8B-B14F-4D97-AF65-F5344CB8AC3E}">
-        <p14:creationId xmlns:p14="http://schemas.microsoft.com/office/powerpoint/2010/main" val="1024086991"/>
+        <p14:creationId xmlns:p14="http://schemas.microsoft.com/office/powerpoint/2010/main" val="2565009397"/>
       </p:ext>
     </p:extLst>
   </p:cSld>
@@ -503,10 +284,6 @@
           <a:bodyPr/>
           <a:lstStyle/>
           <a:p>
-            <a:r>
-              <a:rPr lang="en-US" dirty="0"/>
-              <a:t/>
-            </a:r>
             <a:endParaRPr lang="en-US" dirty="0"/>
           </a:p>
         </p:txBody>
@@ -591,10 +368,6 @@
           <a:bodyPr/>
           <a:lstStyle/>
           <a:p>
-            <a:r>
-              <a:rPr lang="en-US" dirty="0"/>
-              <a:t/>
-            </a:r>
             <a:endParaRPr lang="en-US" dirty="0"/>
           </a:p>
         </p:txBody>
@@ -679,10 +452,6 @@
           <a:bodyPr/>
           <a:lstStyle/>
           <a:p>
-            <a:r>
-              <a:rPr lang="en-US" dirty="0"/>
-              <a:t/>
-            </a:r>
             <a:endParaRPr lang="en-US" dirty="0"/>
           </a:p>
         </p:txBody>
@@ -767,10 +536,6 @@
           <a:bodyPr/>
           <a:lstStyle/>
           <a:p>
-            <a:r>
-              <a:rPr lang="en-US" dirty="0"/>
-              <a:t/>
-            </a:r>
             <a:endParaRPr lang="en-US" dirty="0"/>
           </a:p>
         </p:txBody>
@@ -844,6 +609,11 @@
 <file path=ppt/slideMasters/slideMaster1.xml><?xml version="1.0" encoding="utf-8"?>
 <p:sldMaster xmlns:a="http://schemas.openxmlformats.org/drawingml/2006/main" xmlns:r="http://schemas.openxmlformats.org/officeDocument/2006/relationships" xmlns:p="http://schemas.openxmlformats.org/presentationml/2006/main">
   <p:cSld>
+    <p:bg>
+      <p:bgRef idx="1001">
+        <a:schemeClr val="bg1"/>
+      </p:bgRef>
+    </p:bg>
     <p:spTree>
       <p:nvGrpSpPr>
         <p:cNvPr id="1" name=""/>
@@ -1126,6 +896,7 @@
         <a:solidFill>
           <a:srgbClr val="0E2A47"/>
         </a:solidFill>
+        <a:effectLst/>
       </p:bgPr>
     </p:bg>
     <p:spTree>
@@ -1204,14 +975,14 @@
       </p:sp>
       <p:pic>
         <p:nvPicPr>
-          <p:cNvPr id="5" name="Image 0" descr="credit_card.png">    </p:cNvPr>
+          <p:cNvPr id="5" name="Image 0" descr="credit_card.png"/>
           <p:cNvPicPr>
             <a:picLocks noChangeAspect="1"/>
           </p:cNvPicPr>
           <p:nvPr/>
         </p:nvPicPr>
         <p:blipFill>
-          <a:blip r:embed="rId1"/>
+          <a:blip r:embed="rId3"/>
           <a:stretch>
             <a:fillRect/>
           </a:stretch>
@@ -1247,7 +1018,7 @@
           <a:bodyPr wrap="square" rtlCol="0" anchor="ctr"/>
           <a:lstStyle/>
           <a:p>
-            <a:pPr algn="ctr" indent="0" marL="0">
+            <a:pPr marL="0" indent="0" algn="ctr">
               <a:lnSpc>
                 <a:spcPct val="112000"/>
               </a:lnSpc>
@@ -1267,7 +1038,7 @@
             <a:endParaRPr lang="en-US" sz="3400" dirty="0"/>
           </a:p>
           <a:p>
-            <a:pPr algn="ctr" indent="0" marL="0">
+            <a:pPr marL="0" indent="0" algn="ctr">
               <a:lnSpc>
                 <a:spcPct val="112000"/>
               </a:lnSpc>
@@ -1309,7 +1080,7 @@
           <a:bodyPr wrap="square" rtlCol="0" anchor="ctr"/>
           <a:lstStyle/>
           <a:p>
-            <a:pPr algn="ctr" indent="0" marL="0">
+            <a:pPr marL="0" indent="0" algn="ctr">
               <a:lnSpc>
                 <a:spcPct val="120000"/>
               </a:lnSpc>
@@ -1329,7 +1100,7 @@
             <a:endParaRPr lang="en-US" sz="1500" dirty="0"/>
           </a:p>
           <a:p>
-            <a:pPr algn="ctr" indent="0" marL="0">
+            <a:pPr marL="0" indent="0" algn="ctr">
               <a:lnSpc>
                 <a:spcPct val="120000"/>
               </a:lnSpc>
@@ -1394,7 +1165,7 @@
           <a:bodyPr wrap="square" rtlCol="0" anchor="ctr"/>
           <a:lstStyle/>
           <a:p>
-            <a:pPr algn="ctr" indent="0" marL="0">
+            <a:pPr marL="0" indent="0" algn="ctr">
               <a:buNone/>
             </a:pPr>
             <a:r>
@@ -1433,7 +1204,7 @@
           <a:bodyPr wrap="square" rtlCol="0" anchor="ctr"/>
           <a:lstStyle/>
           <a:p>
-            <a:pPr algn="ctr" indent="0" marL="0">
+            <a:pPr marL="0" indent="0" algn="ctr">
               <a:buNone/>
             </a:pPr>
             <a:r>
@@ -1467,6 +1238,7 @@
         <a:solidFill>
           <a:srgbClr val="FFFFFF"/>
         </a:solidFill>
+        <a:effectLst/>
       </p:bgPr>
     </p:bg>
     <p:spTree>
@@ -1504,7 +1276,7 @@
           <a:bodyPr wrap="square" rtlCol="0" anchor="ctr"/>
           <a:lstStyle/>
           <a:p>
-            <a:pPr indent="0" marL="0">
+            <a:pPr marL="0" indent="0">
               <a:buNone/>
             </a:pPr>
             <a:r>
@@ -1543,7 +1315,7 @@
           </a:solidFill>
           <a:ln/>
           <a:effectLst>
-            <a:outerShdw sx="100000" sy="100000" kx="0" ky="0" algn="bl" rotWithShape="0" blurRad="76200" dist="25400" dir="5400000">
+            <a:outerShdw blurRad="76200" dist="25400" dir="5400000" algn="bl" rotWithShape="0">
               <a:srgbClr val="9DB6D6">
                 <a:alpha val="35000"/>
               </a:srgbClr>
@@ -1573,14 +1345,14 @@
       </p:sp>
       <p:pic>
         <p:nvPicPr>
-          <p:cNvPr id="5" name="Image 0" descr="target.png">    </p:cNvPr>
+          <p:cNvPr id="5" name="Image 0" descr="target.png"/>
           <p:cNvPicPr>
             <a:picLocks noChangeAspect="1"/>
           </p:cNvPicPr>
           <p:nvPr/>
         </p:nvPicPr>
         <p:blipFill>
-          <a:blip r:embed="rId1"/>
+          <a:blip r:embed="rId3"/>
           <a:stretch>
             <a:fillRect/>
           </a:stretch>
@@ -1616,7 +1388,7 @@
           <a:bodyPr wrap="square" rtlCol="0" anchor="ctr"/>
           <a:lstStyle/>
           <a:p>
-            <a:pPr indent="0" marL="0">
+            <a:pPr marL="0" indent="0">
               <a:buNone/>
             </a:pPr>
             <a:r>
@@ -1655,7 +1427,7 @@
           <a:bodyPr wrap="square" rtlCol="0" anchor="t"/>
           <a:lstStyle/>
           <a:p>
-            <a:pPr indent="0" marL="0">
+            <a:pPr marL="0" indent="0">
               <a:lnSpc>
                 <a:spcPct val="115000"/>
               </a:lnSpc>
@@ -1697,7 +1469,7 @@
           </a:solidFill>
           <a:ln/>
           <a:effectLst>
-            <a:outerShdw sx="100000" sy="100000" kx="0" ky="0" algn="bl" rotWithShape="0" blurRad="76200" dist="25400" dir="5400000">
+            <a:outerShdw blurRad="76200" dist="25400" dir="5400000" algn="bl" rotWithShape="0">
               <a:srgbClr val="9DB6D6">
                 <a:alpha val="35000"/>
               </a:srgbClr>
@@ -1727,14 +1499,14 @@
       </p:sp>
       <p:pic>
         <p:nvPicPr>
-          <p:cNvPr id="10" name="Image 1" descr="lightbulb.png">    </p:cNvPr>
+          <p:cNvPr id="10" name="Image 1" descr="lightbulb.png"/>
           <p:cNvPicPr>
             <a:picLocks noChangeAspect="1"/>
           </p:cNvPicPr>
           <p:nvPr/>
         </p:nvPicPr>
         <p:blipFill>
-          <a:blip r:embed="rId2"/>
+          <a:blip r:embed="rId4"/>
           <a:stretch>
             <a:fillRect/>
           </a:stretch>
@@ -1770,7 +1542,7 @@
           <a:bodyPr wrap="square" rtlCol="0" anchor="ctr"/>
           <a:lstStyle/>
           <a:p>
-            <a:pPr indent="0" marL="0">
+            <a:pPr marL="0" indent="0">
               <a:buNone/>
             </a:pPr>
             <a:r>
@@ -1903,7 +1675,7 @@
           </a:solidFill>
           <a:ln/>
           <a:effectLst>
-            <a:outerShdw sx="100000" sy="100000" kx="0" ky="0" algn="bl" rotWithShape="0" blurRad="76200" dist="25400" dir="5400000">
+            <a:outerShdw blurRad="76200" dist="25400" dir="5400000" algn="bl" rotWithShape="0">
               <a:srgbClr val="9DB6D6">
                 <a:alpha val="35000"/>
               </a:srgbClr>
@@ -1933,14 +1705,14 @@
       </p:sp>
       <p:pic>
         <p:nvPicPr>
-          <p:cNvPr id="15" name="Image 2" descr="layers.png">    </p:cNvPr>
+          <p:cNvPr id="15" name="Image 2" descr="layers.png"/>
           <p:cNvPicPr>
             <a:picLocks noChangeAspect="1"/>
           </p:cNvPicPr>
           <p:nvPr/>
         </p:nvPicPr>
         <p:blipFill>
-          <a:blip r:embed="rId3"/>
+          <a:blip r:embed="rId5"/>
           <a:stretch>
             <a:fillRect/>
           </a:stretch>
@@ -1976,7 +1748,7 @@
           <a:bodyPr wrap="square" rtlCol="0" anchor="ctr"/>
           <a:lstStyle/>
           <a:p>
-            <a:pPr indent="0" marL="0">
+            <a:pPr marL="0" indent="0">
               <a:buNone/>
             </a:pPr>
             <a:r>
@@ -2015,7 +1787,7 @@
           <a:bodyPr wrap="square" rtlCol="0" anchor="t"/>
           <a:lstStyle/>
           <a:p>
-            <a:pPr indent="0" marL="0">
+            <a:pPr marL="0" indent="0">
               <a:lnSpc>
                 <a:spcPct val="112000"/>
               </a:lnSpc>
@@ -2038,7 +1810,7 @@
             <a:endParaRPr lang="en-US" sz="1250" dirty="0"/>
           </a:p>
           <a:p>
-            <a:pPr indent="0" marL="0">
+            <a:pPr marL="0" indent="0">
               <a:lnSpc>
                 <a:spcPct val="112000"/>
               </a:lnSpc>
@@ -2083,7 +1855,7 @@
           <a:bodyPr wrap="square" rtlCol="0" anchor="t"/>
           <a:lstStyle/>
           <a:p>
-            <a:pPr indent="0" marL="0">
+            <a:pPr marL="0" indent="0">
               <a:lnSpc>
                 <a:spcPct val="112000"/>
               </a:lnSpc>
@@ -2106,7 +1878,7 @@
             <a:endParaRPr lang="en-US" sz="1250" dirty="0"/>
           </a:p>
           <a:p>
-            <a:pPr indent="0" marL="0">
+            <a:pPr marL="0" indent="0">
               <a:lnSpc>
                 <a:spcPct val="112000"/>
               </a:lnSpc>
@@ -2146,6 +1918,7 @@
         <a:solidFill>
           <a:srgbClr val="FFFFFF"/>
         </a:solidFill>
+        <a:effectLst/>
       </p:bgPr>
     </p:bg>
     <p:spTree>
@@ -2183,7 +1956,7 @@
           <a:bodyPr wrap="square" rtlCol="0" anchor="ctr"/>
           <a:lstStyle/>
           <a:p>
-            <a:pPr indent="0" marL="0">
+            <a:pPr marL="0" indent="0">
               <a:buNone/>
             </a:pPr>
             <a:r>
@@ -2222,7 +1995,7 @@
           <a:bodyPr wrap="square" rtlCol="0" anchor="ctr"/>
           <a:lstStyle/>
           <a:p>
-            <a:pPr indent="0" marL="0">
+            <a:pPr marL="0" indent="0">
               <a:buNone/>
             </a:pPr>
             <a:r>
@@ -2284,295 +2057,7 @@
       </p:sp>
       <p:pic>
         <p:nvPicPr>
-          <p:cNvPr id="6" name="Image 0" descr="stat_users.png">    </p:cNvPr>
-          <p:cNvPicPr>
-            <a:picLocks noChangeAspect="1"/>
-          </p:cNvPicPr>
-          <p:nvPr/>
-        </p:nvPicPr>
-        <p:blipFill>
-          <a:blip r:embed="rId1"/>
-          <a:stretch>
-            <a:fillRect/>
-          </a:stretch>
-        </p:blipFill>
-        <p:spPr>
-          <a:xfrm>
-            <a:off x="818479" y="1516624"/>
-            <a:ext cx="487192" cy="487192"/>
-          </a:xfrm>
-          <a:prstGeom prst="rect">
-            <a:avLst/>
-          </a:prstGeom>
-        </p:spPr>
-      </p:pic>
-      <p:sp>
-        <p:nvSpPr>
-          <p:cNvPr id="7" name="Text 4"/>
-          <p:cNvSpPr/>
-          <p:nvPr/>
-        </p:nvSpPr>
-        <p:spPr>
-          <a:xfrm>
-            <a:off x="1510132" y="1344168"/>
-            <a:ext cx="2468880" cy="457200"/>
-          </a:xfrm>
-          <a:prstGeom prst="rect">
-            <a:avLst/>
-          </a:prstGeom>
-          <a:noFill/>
-          <a:ln/>
-        </p:spPr>
-        <p:txBody>
-          <a:bodyPr wrap="square" rtlCol="0" anchor="ctr"/>
-          <a:lstStyle/>
-          <a:p>
-            <a:pPr indent="0" marL="0">
-              <a:buNone/>
-            </a:pPr>
-            <a:r>
-              <a:rPr lang="en-US" sz="2100" b="1" dirty="0">
-                <a:solidFill>
-                  <a:srgbClr val="0E2A47"/>
-                </a:solidFill>
-                <a:latin typeface="Cambria" pitchFamily="34" charset="0"/>
-                <a:ea typeface="Cambria" pitchFamily="34" charset="-122"/>
-                <a:cs typeface="Cambria" pitchFamily="34" charset="-120"/>
-              </a:rPr>
-              <a:t>30,000</a:t>
-            </a:r>
-            <a:endParaRPr lang="en-US" sz="2100" dirty="0"/>
-          </a:p>
-        </p:txBody>
-      </p:sp>
-      <p:sp>
-        <p:nvSpPr>
-          <p:cNvPr id="8" name="Text 5"/>
-          <p:cNvSpPr/>
-          <p:nvPr/>
-        </p:nvSpPr>
-        <p:spPr>
-          <a:xfrm>
-            <a:off x="1510132" y="1801368"/>
-            <a:ext cx="2468880" cy="384048"/>
-          </a:xfrm>
-          <a:prstGeom prst="rect">
-            <a:avLst/>
-          </a:prstGeom>
-          <a:noFill/>
-          <a:ln/>
-        </p:spPr>
-        <p:txBody>
-          <a:bodyPr wrap="square" rtlCol="0" anchor="t"/>
-          <a:lstStyle/>
-          <a:p>
-            <a:pPr indent="0" marL="0">
-              <a:buNone/>
-            </a:pPr>
-            <a:r>
-              <a:rPr lang="en-US" sz="1050" dirty="0">
-                <a:solidFill>
-                  <a:srgbClr val="5B7290"/>
-                </a:solidFill>
-                <a:latin typeface="Calibri" pitchFamily="34" charset="0"/>
-                <a:ea typeface="Calibri" pitchFamily="34" charset="-122"/>
-                <a:cs typeface="Calibri" pitchFamily="34" charset="-120"/>
-              </a:rPr>
-              <a:t>Khách hàng thẻ tín dụng</a:t>
-            </a:r>
-            <a:endParaRPr lang="en-US" sz="1050" dirty="0"/>
-          </a:p>
-        </p:txBody>
-      </p:sp>
-      <p:sp>
-        <p:nvSpPr>
-          <p:cNvPr id="9" name="Shape 6"/>
-          <p:cNvSpPr/>
-          <p:nvPr/>
-        </p:nvSpPr>
-        <p:spPr>
-          <a:xfrm>
-            <a:off x="4312768" y="1234440"/>
-            <a:ext cx="3566160" cy="1051560"/>
-          </a:xfrm>
-          <a:prstGeom prst="roundRect">
-            <a:avLst>
-              <a:gd name="adj" fmla="val 6087"/>
-            </a:avLst>
-          </a:prstGeom>
-          <a:solidFill>
-            <a:srgbClr val="EAF2FB"/>
-          </a:solidFill>
-          <a:ln/>
-        </p:spPr>
-      </p:sp>
-      <p:sp>
-        <p:nvSpPr>
-          <p:cNvPr id="10" name="Shape 7"/>
-          <p:cNvSpPr/>
-          <p:nvPr/>
-        </p:nvSpPr>
-        <p:spPr>
-          <a:xfrm>
-            <a:off x="4495648" y="1431036"/>
-            <a:ext cx="658368" cy="658368"/>
-          </a:xfrm>
-          <a:prstGeom prst="ellipse">
-            <a:avLst/>
-          </a:prstGeom>
-          <a:solidFill>
-            <a:srgbClr val="1F5FA8"/>
-          </a:solidFill>
-          <a:ln/>
-        </p:spPr>
-      </p:sp>
-      <p:pic>
-        <p:nvPicPr>
-          <p:cNvPr id="11" name="Image 1" descr="stat_db.png">    </p:cNvPr>
-          <p:cNvPicPr>
-            <a:picLocks noChangeAspect="1"/>
-          </p:cNvPicPr>
-          <p:nvPr/>
-        </p:nvPicPr>
-        <p:blipFill>
-          <a:blip r:embed="rId2"/>
-          <a:stretch>
-            <a:fillRect/>
-          </a:stretch>
-        </p:blipFill>
-        <p:spPr>
-          <a:xfrm>
-            <a:off x="4581235" y="1516624"/>
-            <a:ext cx="487192" cy="487192"/>
-          </a:xfrm>
-          <a:prstGeom prst="rect">
-            <a:avLst/>
-          </a:prstGeom>
-        </p:spPr>
-      </p:pic>
-      <p:sp>
-        <p:nvSpPr>
-          <p:cNvPr id="12" name="Text 8"/>
-          <p:cNvSpPr/>
-          <p:nvPr/>
-        </p:nvSpPr>
-        <p:spPr>
-          <a:xfrm>
-            <a:off x="5272888" y="1344168"/>
-            <a:ext cx="2468880" cy="457200"/>
-          </a:xfrm>
-          <a:prstGeom prst="rect">
-            <a:avLst/>
-          </a:prstGeom>
-          <a:noFill/>
-          <a:ln/>
-        </p:spPr>
-        <p:txBody>
-          <a:bodyPr wrap="square" rtlCol="0" anchor="ctr"/>
-          <a:lstStyle/>
-          <a:p>
-            <a:pPr indent="0" marL="0">
-              <a:buNone/>
-            </a:pPr>
-            <a:r>
-              <a:rPr lang="en-US" sz="2100" b="1" dirty="0">
-                <a:solidFill>
-                  <a:srgbClr val="0E2A47"/>
-                </a:solidFill>
-                <a:latin typeface="Cambria" pitchFamily="34" charset="0"/>
-                <a:ea typeface="Cambria" pitchFamily="34" charset="-122"/>
-                <a:cs typeface="Cambria" pitchFamily="34" charset="-120"/>
-              </a:rPr>
-              <a:t>23</a:t>
-            </a:r>
-            <a:endParaRPr lang="en-US" sz="2100" dirty="0"/>
-          </a:p>
-        </p:txBody>
-      </p:sp>
-      <p:sp>
-        <p:nvSpPr>
-          <p:cNvPr id="13" name="Text 9"/>
-          <p:cNvSpPr/>
-          <p:nvPr/>
-        </p:nvSpPr>
-        <p:spPr>
-          <a:xfrm>
-            <a:off x="5272888" y="1801368"/>
-            <a:ext cx="2468880" cy="384048"/>
-          </a:xfrm>
-          <a:prstGeom prst="rect">
-            <a:avLst/>
-          </a:prstGeom>
-          <a:noFill/>
-          <a:ln/>
-        </p:spPr>
-        <p:txBody>
-          <a:bodyPr wrap="square" rtlCol="0" anchor="t"/>
-          <a:lstStyle/>
-          <a:p>
-            <a:pPr indent="0" marL="0">
-              <a:buNone/>
-            </a:pPr>
-            <a:r>
-              <a:rPr lang="en-US" sz="1050" dirty="0">
-                <a:solidFill>
-                  <a:srgbClr val="5B7290"/>
-                </a:solidFill>
-                <a:latin typeface="Calibri" pitchFamily="34" charset="0"/>
-                <a:ea typeface="Calibri" pitchFamily="34" charset="-122"/>
-                <a:cs typeface="Calibri" pitchFamily="34" charset="-120"/>
-              </a:rPr>
-              <a:t>Biến đầu vào + 1 biến mục tiêu</a:t>
-            </a:r>
-            <a:endParaRPr lang="en-US" sz="1050" dirty="0"/>
-          </a:p>
-        </p:txBody>
-      </p:sp>
-      <p:sp>
-        <p:nvSpPr>
-          <p:cNvPr id="14" name="Shape 10"/>
-          <p:cNvSpPr/>
-          <p:nvPr/>
-        </p:nvSpPr>
-        <p:spPr>
-          <a:xfrm>
-            <a:off x="8075524" y="1234440"/>
-            <a:ext cx="3566160" cy="1051560"/>
-          </a:xfrm>
-          <a:prstGeom prst="roundRect">
-            <a:avLst>
-              <a:gd name="adj" fmla="val 6087"/>
-            </a:avLst>
-          </a:prstGeom>
-          <a:solidFill>
-            <a:srgbClr val="EAF2FB"/>
-          </a:solidFill>
-          <a:ln/>
-        </p:spPr>
-      </p:sp>
-      <p:sp>
-        <p:nvSpPr>
-          <p:cNvPr id="15" name="Shape 11"/>
-          <p:cNvSpPr/>
-          <p:nvPr/>
-        </p:nvSpPr>
-        <p:spPr>
-          <a:xfrm>
-            <a:off x="8258404" y="1431036"/>
-            <a:ext cx="658368" cy="658368"/>
-          </a:xfrm>
-          <a:prstGeom prst="ellipse">
-            <a:avLst/>
-          </a:prstGeom>
-          <a:solidFill>
-            <a:srgbClr val="1F5FA8"/>
-          </a:solidFill>
-          <a:ln/>
-        </p:spPr>
-      </p:sp>
-      <p:pic>
-        <p:nvPicPr>
-          <p:cNvPr id="16" name="Image 2" descr="stat_alert.png">    </p:cNvPr>
+          <p:cNvPr id="6" name="Image 0" descr="stat_users.png"/>
           <p:cNvPicPr>
             <a:picLocks noChangeAspect="1"/>
           </p:cNvPicPr>
@@ -2586,7 +2071,7 @@
         </p:blipFill>
         <p:spPr>
           <a:xfrm>
-            <a:off x="8343991" y="1516624"/>
+            <a:off x="818479" y="1516624"/>
             <a:ext cx="487192" cy="487192"/>
           </a:xfrm>
           <a:prstGeom prst="rect">
@@ -2596,13 +2081,13 @@
       </p:pic>
       <p:sp>
         <p:nvSpPr>
-          <p:cNvPr id="17" name="Text 12"/>
-          <p:cNvSpPr/>
-          <p:nvPr/>
-        </p:nvSpPr>
-        <p:spPr>
-          <a:xfrm>
-            <a:off x="9035644" y="1344168"/>
+          <p:cNvPr id="7" name="Text 4"/>
+          <p:cNvSpPr/>
+          <p:nvPr/>
+        </p:nvSpPr>
+        <p:spPr>
+          <a:xfrm>
+            <a:off x="1510132" y="1344168"/>
             <a:ext cx="2468880" cy="457200"/>
           </a:xfrm>
           <a:prstGeom prst="rect">
@@ -2615,7 +2100,7 @@
           <a:bodyPr wrap="square" rtlCol="0" anchor="ctr"/>
           <a:lstStyle/>
           <a:p>
-            <a:pPr indent="0" marL="0">
+            <a:pPr marL="0" indent="0">
               <a:buNone/>
             </a:pPr>
             <a:r>
@@ -2627,7 +2112,7 @@
                 <a:ea typeface="Cambria" pitchFamily="34" charset="-122"/>
                 <a:cs typeface="Cambria" pitchFamily="34" charset="-120"/>
               </a:rPr>
-              <a:t>~22%</a:t>
+              <a:t>30,000</a:t>
             </a:r>
             <a:endParaRPr lang="en-US" sz="2100" dirty="0"/>
           </a:p>
@@ -2635,13 +2120,13 @@
       </p:sp>
       <p:sp>
         <p:nvSpPr>
-          <p:cNvPr id="18" name="Text 13"/>
-          <p:cNvSpPr/>
-          <p:nvPr/>
-        </p:nvSpPr>
-        <p:spPr>
-          <a:xfrm>
-            <a:off x="9035644" y="1801368"/>
+          <p:cNvPr id="8" name="Text 5"/>
+          <p:cNvSpPr/>
+          <p:nvPr/>
+        </p:nvSpPr>
+        <p:spPr>
+          <a:xfrm>
+            <a:off x="1510132" y="1801368"/>
             <a:ext cx="2468880" cy="384048"/>
           </a:xfrm>
           <a:prstGeom prst="rect">
@@ -2654,7 +2139,7 @@
           <a:bodyPr wrap="square" rtlCol="0" anchor="t"/>
           <a:lstStyle/>
           <a:p>
-            <a:pPr indent="0" marL="0">
+            <a:pPr marL="0" indent="0">
               <a:buNone/>
             </a:pPr>
             <a:r>
@@ -2666,7 +2151,7 @@
                 <a:ea typeface="Calibri" pitchFamily="34" charset="-122"/>
                 <a:cs typeface="Calibri" pitchFamily="34" charset="-120"/>
               </a:rPr>
-              <a:t>Tỷ lệ vỡ nợ (mất cân bằng)</a:t>
+              <a:t>Khách hàng thẻ tín dụng</a:t>
             </a:r>
             <a:endParaRPr lang="en-US" sz="1050" dirty="0"/>
           </a:p>
@@ -2674,385 +2159,36 @@
       </p:sp>
       <p:sp>
         <p:nvSpPr>
-          <p:cNvPr id="19" name="Shape 14"/>
-          <p:cNvSpPr/>
-          <p:nvPr/>
-        </p:nvSpPr>
-        <p:spPr>
-          <a:xfrm>
-            <a:off x="550012" y="2450592"/>
-            <a:ext cx="3767328" cy="310896"/>
+          <p:cNvPr id="9" name="Shape 6"/>
+          <p:cNvSpPr/>
+          <p:nvPr/>
+        </p:nvSpPr>
+        <p:spPr>
+          <a:xfrm>
+            <a:off x="4312768" y="1234440"/>
+            <a:ext cx="3566160" cy="1051560"/>
           </a:xfrm>
           <a:prstGeom prst="roundRect">
             <a:avLst>
-              <a:gd name="adj" fmla="val 50000"/>
+              <a:gd name="adj" fmla="val 6087"/>
             </a:avLst>
           </a:prstGeom>
           <a:solidFill>
-            <a:srgbClr val="1F5FA8"/>
-          </a:solidFill>
-          <a:ln/>
-        </p:spPr>
-      </p:sp>
-      <p:sp>
-        <p:nvSpPr>
-          <p:cNvPr id="20" name="Text 15"/>
-          <p:cNvSpPr/>
-          <p:nvPr/>
-        </p:nvSpPr>
-        <p:spPr>
-          <a:xfrm>
-            <a:off x="550012" y="2450592"/>
-            <a:ext cx="3767328" cy="310896"/>
-          </a:xfrm>
-          <a:prstGeom prst="rect">
-            <a:avLst/>
-          </a:prstGeom>
-          <a:noFill/>
-          <a:ln/>
-        </p:spPr>
-        <p:txBody>
-          <a:bodyPr wrap="square" rtlCol="0" anchor="ctr"/>
-          <a:lstStyle/>
-          <a:p>
-            <a:pPr algn="ctr" indent="0" marL="0">
-              <a:buNone/>
-            </a:pPr>
-            <a:r>
-              <a:rPr lang="en-US" sz="900" dirty="0">
-                <a:solidFill>
-                  <a:srgbClr val="FFFFFF"/>
-                </a:solidFill>
-                <a:latin typeface="Calibri" pitchFamily="34" charset="0"/>
-                <a:ea typeface="Calibri" pitchFamily="34" charset="-122"/>
-                <a:cs typeface="Calibri" pitchFamily="34" charset="-120"/>
-              </a:rPr>
-              <a:t>Nhân khẩu học: LIMIT_BAL, SEX, EDUCATION, MARRIAGE, AGE</a:t>
-            </a:r>
-            <a:endParaRPr lang="en-US" sz="900" dirty="0"/>
-          </a:p>
-        </p:txBody>
-      </p:sp>
-      <p:sp>
-        <p:nvSpPr>
-          <p:cNvPr id="21" name="Shape 16"/>
-          <p:cNvSpPr/>
-          <p:nvPr/>
-        </p:nvSpPr>
-        <p:spPr>
-          <a:xfrm>
-            <a:off x="4463644" y="2450592"/>
-            <a:ext cx="2055571" cy="310896"/>
-          </a:xfrm>
-          <a:prstGeom prst="roundRect">
-            <a:avLst>
-              <a:gd name="adj" fmla="val 50000"/>
-            </a:avLst>
-          </a:prstGeom>
-          <a:solidFill>
-            <a:srgbClr val="1F5FA8"/>
-          </a:solidFill>
-          <a:ln/>
-        </p:spPr>
-      </p:sp>
-      <p:sp>
-        <p:nvSpPr>
-          <p:cNvPr id="22" name="Text 17"/>
-          <p:cNvSpPr/>
-          <p:nvPr/>
-        </p:nvSpPr>
-        <p:spPr>
-          <a:xfrm>
-            <a:off x="4463644" y="2450592"/>
-            <a:ext cx="2055571" cy="310896"/>
-          </a:xfrm>
-          <a:prstGeom prst="rect">
-            <a:avLst/>
-          </a:prstGeom>
-          <a:noFill/>
-          <a:ln/>
-        </p:spPr>
-        <p:txBody>
-          <a:bodyPr wrap="square" rtlCol="0" anchor="ctr"/>
-          <a:lstStyle/>
-          <a:p>
-            <a:pPr algn="ctr" indent="0" marL="0">
-              <a:buNone/>
-            </a:pPr>
-            <a:r>
-              <a:rPr lang="en-US" sz="900" dirty="0">
-                <a:solidFill>
-                  <a:srgbClr val="FFFFFF"/>
-                </a:solidFill>
-                <a:latin typeface="Calibri" pitchFamily="34" charset="0"/>
-                <a:ea typeface="Calibri" pitchFamily="34" charset="-122"/>
-                <a:cs typeface="Calibri" pitchFamily="34" charset="-120"/>
-              </a:rPr>
-              <a:t>Lịch sử trả nợ: PAY_1 – PAY_6</a:t>
-            </a:r>
-            <a:endParaRPr lang="en-US" sz="900" dirty="0"/>
-          </a:p>
-        </p:txBody>
-      </p:sp>
-      <p:sp>
-        <p:nvSpPr>
-          <p:cNvPr id="23" name="Shape 18"/>
-          <p:cNvSpPr/>
-          <p:nvPr/>
-        </p:nvSpPr>
-        <p:spPr>
-          <a:xfrm>
-            <a:off x="6665519" y="2450592"/>
-            <a:ext cx="1989734" cy="310896"/>
-          </a:xfrm>
-          <a:prstGeom prst="roundRect">
-            <a:avLst>
-              <a:gd name="adj" fmla="val 50000"/>
-            </a:avLst>
-          </a:prstGeom>
-          <a:solidFill>
-            <a:srgbClr val="1F5FA8"/>
-          </a:solidFill>
-          <a:ln/>
-        </p:spPr>
-      </p:sp>
-      <p:sp>
-        <p:nvSpPr>
-          <p:cNvPr id="24" name="Text 19"/>
-          <p:cNvSpPr/>
-          <p:nvPr/>
-        </p:nvSpPr>
-        <p:spPr>
-          <a:xfrm>
-            <a:off x="6665519" y="2450592"/>
-            <a:ext cx="1989734" cy="310896"/>
-          </a:xfrm>
-          <a:prstGeom prst="rect">
-            <a:avLst/>
-          </a:prstGeom>
-          <a:noFill/>
-          <a:ln/>
-        </p:spPr>
-        <p:txBody>
-          <a:bodyPr wrap="square" rtlCol="0" anchor="ctr"/>
-          <a:lstStyle/>
-          <a:p>
-            <a:pPr algn="ctr" indent="0" marL="0">
-              <a:buNone/>
-            </a:pPr>
-            <a:r>
-              <a:rPr lang="en-US" sz="900" dirty="0">
-                <a:solidFill>
-                  <a:srgbClr val="FFFFFF"/>
-                </a:solidFill>
-                <a:latin typeface="Calibri" pitchFamily="34" charset="0"/>
-                <a:ea typeface="Calibri" pitchFamily="34" charset="-122"/>
-                <a:cs typeface="Calibri" pitchFamily="34" charset="-120"/>
-              </a:rPr>
-              <a:t>Dư nợ hoá đơn: BILL_AMT1 – 6</a:t>
-            </a:r>
-            <a:endParaRPr lang="en-US" sz="900" dirty="0"/>
-          </a:p>
-        </p:txBody>
-      </p:sp>
-      <p:sp>
-        <p:nvSpPr>
-          <p:cNvPr id="25" name="Shape 20"/>
-          <p:cNvSpPr/>
-          <p:nvPr/>
-        </p:nvSpPr>
-        <p:spPr>
-          <a:xfrm>
-            <a:off x="8801557" y="2450592"/>
-            <a:ext cx="1726387" cy="310896"/>
-          </a:xfrm>
-          <a:prstGeom prst="roundRect">
-            <a:avLst>
-              <a:gd name="adj" fmla="val 50000"/>
-            </a:avLst>
-          </a:prstGeom>
-          <a:solidFill>
-            <a:srgbClr val="1F5FA8"/>
-          </a:solidFill>
-          <a:ln/>
-        </p:spPr>
-      </p:sp>
-      <p:sp>
-        <p:nvSpPr>
-          <p:cNvPr id="26" name="Text 21"/>
-          <p:cNvSpPr/>
-          <p:nvPr/>
-        </p:nvSpPr>
-        <p:spPr>
-          <a:xfrm>
-            <a:off x="8801557" y="2450592"/>
-            <a:ext cx="1726387" cy="310896"/>
-          </a:xfrm>
-          <a:prstGeom prst="rect">
-            <a:avLst/>
-          </a:prstGeom>
-          <a:noFill/>
-          <a:ln/>
-        </p:spPr>
-        <p:txBody>
-          <a:bodyPr wrap="square" rtlCol="0" anchor="ctr"/>
-          <a:lstStyle/>
-          <a:p>
-            <a:pPr algn="ctr" indent="0" marL="0">
-              <a:buNone/>
-            </a:pPr>
-            <a:r>
-              <a:rPr lang="en-US" sz="900" dirty="0">
-                <a:solidFill>
-                  <a:srgbClr val="FFFFFF"/>
-                </a:solidFill>
-                <a:latin typeface="Calibri" pitchFamily="34" charset="0"/>
-                <a:ea typeface="Calibri" pitchFamily="34" charset="-122"/>
-                <a:cs typeface="Calibri" pitchFamily="34" charset="-120"/>
-              </a:rPr>
-              <a:t>Thanh toán: PAY_AMT1 – 6</a:t>
-            </a:r>
-            <a:endParaRPr lang="en-US" sz="900" dirty="0"/>
-          </a:p>
-        </p:txBody>
-      </p:sp>
-      <p:sp>
-        <p:nvSpPr>
-          <p:cNvPr id="27" name="Text 22"/>
-          <p:cNvSpPr/>
-          <p:nvPr/>
-        </p:nvSpPr>
-        <p:spPr>
-          <a:xfrm>
-            <a:off x="548640" y="3035808"/>
-            <a:ext cx="11091672" cy="320040"/>
-          </a:xfrm>
-          <a:prstGeom prst="rect">
-            <a:avLst/>
-          </a:prstGeom>
-          <a:noFill/>
-          <a:ln/>
-        </p:spPr>
-        <p:txBody>
-          <a:bodyPr wrap="square" rtlCol="0" anchor="ctr"/>
-          <a:lstStyle/>
-          <a:p>
-            <a:pPr indent="0" marL="0">
-              <a:buNone/>
-            </a:pPr>
-            <a:r>
-              <a:rPr lang="en-US" sz="1200" b="1" dirty="0">
-                <a:solidFill>
-                  <a:srgbClr val="1F5FA8"/>
-                </a:solidFill>
-                <a:latin typeface="Calibri" pitchFamily="34" charset="0"/>
-                <a:ea typeface="Calibri" pitchFamily="34" charset="-122"/>
-                <a:cs typeface="Calibri" pitchFamily="34" charset="-120"/>
-              </a:rPr>
-              <a:t>QUY TRÌNH XỬ LÝ (PIPELINE)</a:t>
-            </a:r>
-            <a:endParaRPr lang="en-US" sz="1200" dirty="0"/>
-          </a:p>
-        </p:txBody>
-      </p:sp>
-      <p:sp>
-        <p:nvSpPr>
-          <p:cNvPr id="28" name="Shape 23"/>
-          <p:cNvSpPr/>
-          <p:nvPr/>
-        </p:nvSpPr>
-        <p:spPr>
-          <a:xfrm>
-            <a:off x="764896" y="3456432"/>
-            <a:ext cx="2514600" cy="1417320"/>
-          </a:xfrm>
-          <a:prstGeom prst="roundRect">
-            <a:avLst>
-              <a:gd name="adj" fmla="val 5161"/>
-            </a:avLst>
-          </a:prstGeom>
-          <a:solidFill>
             <a:srgbClr val="EAF2FB"/>
           </a:solidFill>
           <a:ln/>
-          <a:effectLst>
-            <a:outerShdw sx="100000" sy="100000" kx="0" ky="0" algn="bl" rotWithShape="0" blurRad="63500" dist="25400" dir="5400000">
-              <a:srgbClr val="9DB6D6">
-                <a:alpha val="30000"/>
-              </a:srgbClr>
-            </a:outerShdw>
-          </a:effectLst>
-        </p:spPr>
-      </p:sp>
-      <p:sp>
-        <p:nvSpPr>
-          <p:cNvPr id="29" name="Shape 24"/>
-          <p:cNvSpPr/>
-          <p:nvPr/>
-        </p:nvSpPr>
-        <p:spPr>
-          <a:xfrm>
-            <a:off x="2895448" y="3511296"/>
-            <a:ext cx="292608" cy="292608"/>
-          </a:xfrm>
-          <a:prstGeom prst="ellipse">
-            <a:avLst/>
-          </a:prstGeom>
-          <a:solidFill>
-            <a:srgbClr val="0E2A47"/>
-          </a:solidFill>
-          <a:ln/>
-        </p:spPr>
-      </p:sp>
-      <p:sp>
-        <p:nvSpPr>
-          <p:cNvPr id="30" name="Text 25"/>
-          <p:cNvSpPr/>
-          <p:nvPr/>
-        </p:nvSpPr>
-        <p:spPr>
-          <a:xfrm>
-            <a:off x="2895448" y="3511296"/>
-            <a:ext cx="292608" cy="292608"/>
-          </a:xfrm>
-          <a:prstGeom prst="rect">
-            <a:avLst/>
-          </a:prstGeom>
-          <a:noFill/>
-          <a:ln/>
-        </p:spPr>
-        <p:txBody>
-          <a:bodyPr wrap="square" rtlCol="0" anchor="ctr"/>
-          <a:lstStyle/>
-          <a:p>
-            <a:pPr algn="ctr" indent="0" marL="0">
-              <a:buNone/>
-            </a:pPr>
-            <a:r>
-              <a:rPr lang="en-US" sz="1200" b="1" dirty="0">
-                <a:solidFill>
-                  <a:srgbClr val="FFFFFF"/>
-                </a:solidFill>
-                <a:latin typeface="Calibri" pitchFamily="34" charset="0"/>
-                <a:ea typeface="Calibri" pitchFamily="34" charset="-122"/>
-                <a:cs typeface="Calibri" pitchFamily="34" charset="-120"/>
-              </a:rPr>
-              <a:t>1</a:t>
-            </a:r>
-            <a:endParaRPr lang="en-US" sz="1200" dirty="0"/>
-          </a:p>
-        </p:txBody>
-      </p:sp>
-      <p:sp>
-        <p:nvSpPr>
-          <p:cNvPr id="31" name="Shape 26"/>
-          <p:cNvSpPr/>
-          <p:nvPr/>
-        </p:nvSpPr>
-        <p:spPr>
-          <a:xfrm>
-            <a:off x="1738732" y="3621024"/>
-            <a:ext cx="566928" cy="566928"/>
+        </p:spPr>
+      </p:sp>
+      <p:sp>
+        <p:nvSpPr>
+          <p:cNvPr id="10" name="Shape 7"/>
+          <p:cNvSpPr/>
+          <p:nvPr/>
+        </p:nvSpPr>
+        <p:spPr>
+          <a:xfrm>
+            <a:off x="4495648" y="1431036"/>
+            <a:ext cx="658368" cy="658368"/>
           </a:xfrm>
           <a:prstGeom prst="ellipse">
             <a:avLst/>
@@ -3065,7 +2201,7 @@
       </p:sp>
       <p:pic>
         <p:nvPicPr>
-          <p:cNvPr id="32" name="Image 3" descr="step_filter.png">    </p:cNvPr>
+          <p:cNvPr id="11" name="Image 1" descr="stat_db.png"/>
           <p:cNvPicPr>
             <a:picLocks noChangeAspect="1"/>
           </p:cNvPicPr>
@@ -3079,8 +2215,8 @@
         </p:blipFill>
         <p:spPr>
           <a:xfrm>
-            <a:off x="1812432" y="3694725"/>
-            <a:ext cx="419527" cy="419527"/>
+            <a:off x="4581235" y="1516624"/>
+            <a:ext cx="487192" cy="487192"/>
           </a:xfrm>
           <a:prstGeom prst="rect">
             <a:avLst/>
@@ -3089,14 +2225,53 @@
       </p:pic>
       <p:sp>
         <p:nvSpPr>
-          <p:cNvPr id="33" name="Text 27"/>
-          <p:cNvSpPr/>
-          <p:nvPr/>
-        </p:nvSpPr>
-        <p:spPr>
-          <a:xfrm>
-            <a:off x="874624" y="4325112"/>
-            <a:ext cx="2295144" cy="502920"/>
+          <p:cNvPr id="12" name="Text 8"/>
+          <p:cNvSpPr/>
+          <p:nvPr/>
+        </p:nvSpPr>
+        <p:spPr>
+          <a:xfrm>
+            <a:off x="5272888" y="1344168"/>
+            <a:ext cx="2468880" cy="457200"/>
+          </a:xfrm>
+          <a:prstGeom prst="rect">
+            <a:avLst/>
+          </a:prstGeom>
+          <a:noFill/>
+          <a:ln/>
+        </p:spPr>
+        <p:txBody>
+          <a:bodyPr wrap="square" rtlCol="0" anchor="ctr"/>
+          <a:lstStyle/>
+          <a:p>
+            <a:pPr marL="0" indent="0">
+              <a:buNone/>
+            </a:pPr>
+            <a:r>
+              <a:rPr lang="en-US" sz="2100" b="1" dirty="0">
+                <a:solidFill>
+                  <a:srgbClr val="0E2A47"/>
+                </a:solidFill>
+                <a:latin typeface="Cambria" pitchFamily="34" charset="0"/>
+                <a:ea typeface="Cambria" pitchFamily="34" charset="-122"/>
+                <a:cs typeface="Cambria" pitchFamily="34" charset="-120"/>
+              </a:rPr>
+              <a:t>23</a:t>
+            </a:r>
+            <a:endParaRPr lang="en-US" sz="2100" dirty="0"/>
+          </a:p>
+        </p:txBody>
+      </p:sp>
+      <p:sp>
+        <p:nvSpPr>
+          <p:cNvPr id="13" name="Text 9"/>
+          <p:cNvSpPr/>
+          <p:nvPr/>
+        </p:nvSpPr>
+        <p:spPr>
+          <a:xfrm>
+            <a:off x="5272888" y="1801368"/>
+            <a:ext cx="2468880" cy="384048"/>
           </a:xfrm>
           <a:prstGeom prst="rect">
             <a:avLst/>
@@ -3108,145 +2283,56 @@
           <a:bodyPr wrap="square" rtlCol="0" anchor="t"/>
           <a:lstStyle/>
           <a:p>
-            <a:pPr algn="ctr" indent="0" marL="0">
-              <a:lnSpc>
-                <a:spcPct val="105000"/>
-              </a:lnSpc>
+            <a:pPr marL="0" indent="0">
               <a:buNone/>
             </a:pPr>
             <a:r>
-              <a:rPr lang="en-US" sz="1150" b="1" dirty="0">
-                <a:solidFill>
-                  <a:srgbClr val="0E2A47"/>
+              <a:rPr lang="en-US" sz="1050" dirty="0">
+                <a:solidFill>
+                  <a:srgbClr val="5B7290"/>
                 </a:solidFill>
                 <a:latin typeface="Calibri" pitchFamily="34" charset="0"/>
                 <a:ea typeface="Calibri" pitchFamily="34" charset="-122"/>
                 <a:cs typeface="Calibri" pitchFamily="34" charset="-120"/>
               </a:rPr>
-              <a:t>Làm sạch dữ liệu</a:t>
-            </a:r>
-            <a:endParaRPr lang="en-US" sz="1150" dirty="0"/>
+              <a:t>Biến đầu vào + 1 biến mục tiêu</a:t>
+            </a:r>
+            <a:endParaRPr lang="en-US" sz="1050" dirty="0"/>
           </a:p>
         </p:txBody>
       </p:sp>
       <p:sp>
         <p:nvSpPr>
-          <p:cNvPr id="34" name="Shape 28"/>
-          <p:cNvSpPr/>
-          <p:nvPr/>
-        </p:nvSpPr>
-        <p:spPr>
-          <a:xfrm>
-            <a:off x="3315706" y="4046220"/>
-            <a:ext cx="128748" cy="237744"/>
-          </a:xfrm>
-          <a:prstGeom prst="chevron">
-            <a:avLst/>
-          </a:prstGeom>
-          <a:solidFill>
-            <a:srgbClr val="1F5FA8"/>
-          </a:solidFill>
-          <a:ln/>
-        </p:spPr>
-      </p:sp>
-      <p:sp>
-        <p:nvSpPr>
-          <p:cNvPr id="35" name="Shape 29"/>
-          <p:cNvSpPr/>
-          <p:nvPr/>
-        </p:nvSpPr>
-        <p:spPr>
-          <a:xfrm>
-            <a:off x="3480664" y="3456432"/>
-            <a:ext cx="2514600" cy="1417320"/>
+          <p:cNvPr id="14" name="Shape 10"/>
+          <p:cNvSpPr/>
+          <p:nvPr/>
+        </p:nvSpPr>
+        <p:spPr>
+          <a:xfrm>
+            <a:off x="8075524" y="1234440"/>
+            <a:ext cx="3566160" cy="1051560"/>
           </a:xfrm>
           <a:prstGeom prst="roundRect">
             <a:avLst>
-              <a:gd name="adj" fmla="val 5161"/>
+              <a:gd name="adj" fmla="val 6087"/>
             </a:avLst>
           </a:prstGeom>
           <a:solidFill>
             <a:srgbClr val="EAF2FB"/>
           </a:solidFill>
           <a:ln/>
-          <a:effectLst>
-            <a:outerShdw sx="100000" sy="100000" kx="0" ky="0" algn="bl" rotWithShape="0" blurRad="63500" dist="25400" dir="5400000">
-              <a:srgbClr val="9DB6D6">
-                <a:alpha val="30000"/>
-              </a:srgbClr>
-            </a:outerShdw>
-          </a:effectLst>
-        </p:spPr>
-      </p:sp>
-      <p:sp>
-        <p:nvSpPr>
-          <p:cNvPr id="36" name="Shape 30"/>
-          <p:cNvSpPr/>
-          <p:nvPr/>
-        </p:nvSpPr>
-        <p:spPr>
-          <a:xfrm>
-            <a:off x="5611216" y="3511296"/>
-            <a:ext cx="292608" cy="292608"/>
-          </a:xfrm>
-          <a:prstGeom prst="ellipse">
-            <a:avLst/>
-          </a:prstGeom>
-          <a:solidFill>
-            <a:srgbClr val="0E2A47"/>
-          </a:solidFill>
-          <a:ln/>
-        </p:spPr>
-      </p:sp>
-      <p:sp>
-        <p:nvSpPr>
-          <p:cNvPr id="37" name="Text 31"/>
-          <p:cNvSpPr/>
-          <p:nvPr/>
-        </p:nvSpPr>
-        <p:spPr>
-          <a:xfrm>
-            <a:off x="5611216" y="3511296"/>
-            <a:ext cx="292608" cy="292608"/>
-          </a:xfrm>
-          <a:prstGeom prst="rect">
-            <a:avLst/>
-          </a:prstGeom>
-          <a:noFill/>
-          <a:ln/>
-        </p:spPr>
-        <p:txBody>
-          <a:bodyPr wrap="square" rtlCol="0" anchor="ctr"/>
-          <a:lstStyle/>
-          <a:p>
-            <a:pPr algn="ctr" indent="0" marL="0">
-              <a:buNone/>
-            </a:pPr>
-            <a:r>
-              <a:rPr lang="en-US" sz="1200" b="1" dirty="0">
-                <a:solidFill>
-                  <a:srgbClr val="FFFFFF"/>
-                </a:solidFill>
-                <a:latin typeface="Calibri" pitchFamily="34" charset="0"/>
-                <a:ea typeface="Calibri" pitchFamily="34" charset="-122"/>
-                <a:cs typeface="Calibri" pitchFamily="34" charset="-120"/>
-              </a:rPr>
-              <a:t>2</a:t>
-            </a:r>
-            <a:endParaRPr lang="en-US" sz="1200" dirty="0"/>
-          </a:p>
-        </p:txBody>
-      </p:sp>
-      <p:sp>
-        <p:nvSpPr>
-          <p:cNvPr id="38" name="Shape 32"/>
-          <p:cNvSpPr/>
-          <p:nvPr/>
-        </p:nvSpPr>
-        <p:spPr>
-          <a:xfrm>
-            <a:off x="4454500" y="3621024"/>
-            <a:ext cx="566928" cy="566928"/>
+        </p:spPr>
+      </p:sp>
+      <p:sp>
+        <p:nvSpPr>
+          <p:cNvPr id="15" name="Shape 11"/>
+          <p:cNvSpPr/>
+          <p:nvPr/>
+        </p:nvSpPr>
+        <p:spPr>
+          <a:xfrm>
+            <a:off x="8258404" y="1431036"/>
+            <a:ext cx="658368" cy="658368"/>
           </a:xfrm>
           <a:prstGeom prst="ellipse">
             <a:avLst/>
@@ -3259,7 +2345,7 @@
       </p:sp>
       <p:pic>
         <p:nvPicPr>
-          <p:cNvPr id="39" name="Image 4" descr="step_sliders.png">    </p:cNvPr>
+          <p:cNvPr id="16" name="Image 2" descr="stat_alert.png"/>
           <p:cNvPicPr>
             <a:picLocks noChangeAspect="1"/>
           </p:cNvPicPr>
@@ -3273,8 +2359,8 @@
         </p:blipFill>
         <p:spPr>
           <a:xfrm>
-            <a:off x="4528200" y="3694725"/>
-            <a:ext cx="419527" cy="419527"/>
+            <a:off x="8343991" y="1516624"/>
+            <a:ext cx="487192" cy="487192"/>
           </a:xfrm>
           <a:prstGeom prst="rect">
             <a:avLst/>
@@ -3283,14 +2369,53 @@
       </p:pic>
       <p:sp>
         <p:nvSpPr>
-          <p:cNvPr id="40" name="Text 33"/>
-          <p:cNvSpPr/>
-          <p:nvPr/>
-        </p:nvSpPr>
-        <p:spPr>
-          <a:xfrm>
-            <a:off x="3590392" y="4325112"/>
-            <a:ext cx="2295144" cy="502920"/>
+          <p:cNvPr id="17" name="Text 12"/>
+          <p:cNvSpPr/>
+          <p:nvPr/>
+        </p:nvSpPr>
+        <p:spPr>
+          <a:xfrm>
+            <a:off x="9035644" y="1344168"/>
+            <a:ext cx="2468880" cy="457200"/>
+          </a:xfrm>
+          <a:prstGeom prst="rect">
+            <a:avLst/>
+          </a:prstGeom>
+          <a:noFill/>
+          <a:ln/>
+        </p:spPr>
+        <p:txBody>
+          <a:bodyPr wrap="square" rtlCol="0" anchor="ctr"/>
+          <a:lstStyle/>
+          <a:p>
+            <a:pPr marL="0" indent="0">
+              <a:buNone/>
+            </a:pPr>
+            <a:r>
+              <a:rPr lang="en-US" sz="2100" b="1" dirty="0">
+                <a:solidFill>
+                  <a:srgbClr val="0E2A47"/>
+                </a:solidFill>
+                <a:latin typeface="Cambria" pitchFamily="34" charset="0"/>
+                <a:ea typeface="Cambria" pitchFamily="34" charset="-122"/>
+                <a:cs typeface="Cambria" pitchFamily="34" charset="-120"/>
+              </a:rPr>
+              <a:t>~22%</a:t>
+            </a:r>
+            <a:endParaRPr lang="en-US" sz="2100" dirty="0"/>
+          </a:p>
+        </p:txBody>
+      </p:sp>
+      <p:sp>
+        <p:nvSpPr>
+          <p:cNvPr id="18" name="Text 13"/>
+          <p:cNvSpPr/>
+          <p:nvPr/>
+        </p:nvSpPr>
+        <p:spPr>
+          <a:xfrm>
+            <a:off x="9035644" y="1801368"/>
+            <a:ext cx="2468880" cy="384048"/>
           </a:xfrm>
           <a:prstGeom prst="rect">
             <a:avLst/>
@@ -3302,40 +2427,39 @@
           <a:bodyPr wrap="square" rtlCol="0" anchor="t"/>
           <a:lstStyle/>
           <a:p>
-            <a:pPr algn="ctr" indent="0" marL="0">
-              <a:lnSpc>
-                <a:spcPct val="105000"/>
-              </a:lnSpc>
+            <a:pPr marL="0" indent="0">
               <a:buNone/>
             </a:pPr>
             <a:r>
-              <a:rPr lang="en-US" sz="1150" b="1" dirty="0">
-                <a:solidFill>
-                  <a:srgbClr val="0E2A47"/>
+              <a:rPr lang="en-US" sz="1050" dirty="0">
+                <a:solidFill>
+                  <a:srgbClr val="5B7290"/>
                 </a:solidFill>
                 <a:latin typeface="Calibri" pitchFamily="34" charset="0"/>
                 <a:ea typeface="Calibri" pitchFamily="34" charset="-122"/>
                 <a:cs typeface="Calibri" pitchFamily="34" charset="-120"/>
               </a:rPr>
-              <a:t>Feature Engineering</a:t>
-            </a:r>
-            <a:endParaRPr lang="en-US" sz="1150" dirty="0"/>
+              <a:t>Tỷ lệ vỡ nợ (mất cân bằng)</a:t>
+            </a:r>
+            <a:endParaRPr lang="en-US" sz="1050" dirty="0"/>
           </a:p>
         </p:txBody>
       </p:sp>
       <p:sp>
         <p:nvSpPr>
-          <p:cNvPr id="41" name="Shape 34"/>
-          <p:cNvSpPr/>
-          <p:nvPr/>
-        </p:nvSpPr>
-        <p:spPr>
-          <a:xfrm>
-            <a:off x="6031474" y="4046220"/>
-            <a:ext cx="128748" cy="237744"/>
-          </a:xfrm>
-          <a:prstGeom prst="chevron">
-            <a:avLst/>
+          <p:cNvPr id="19" name="Shape 14"/>
+          <p:cNvSpPr/>
+          <p:nvPr/>
+        </p:nvSpPr>
+        <p:spPr>
+          <a:xfrm>
+            <a:off x="550012" y="2450592"/>
+            <a:ext cx="3767328" cy="310896"/>
+          </a:xfrm>
+          <a:prstGeom prst="roundRect">
+            <a:avLst>
+              <a:gd name="adj" fmla="val 50000"/>
+            </a:avLst>
           </a:prstGeom>
           <a:solidFill>
             <a:srgbClr val="1F5FA8"/>
@@ -3345,13 +2469,274 @@
       </p:sp>
       <p:sp>
         <p:nvSpPr>
-          <p:cNvPr id="42" name="Shape 35"/>
-          <p:cNvSpPr/>
-          <p:nvPr/>
-        </p:nvSpPr>
-        <p:spPr>
-          <a:xfrm>
-            <a:off x="6196432" y="3456432"/>
+          <p:cNvPr id="20" name="Text 15"/>
+          <p:cNvSpPr/>
+          <p:nvPr/>
+        </p:nvSpPr>
+        <p:spPr>
+          <a:xfrm>
+            <a:off x="550012" y="2450592"/>
+            <a:ext cx="3767328" cy="310896"/>
+          </a:xfrm>
+          <a:prstGeom prst="rect">
+            <a:avLst/>
+          </a:prstGeom>
+          <a:noFill/>
+          <a:ln/>
+        </p:spPr>
+        <p:txBody>
+          <a:bodyPr wrap="square" rtlCol="0" anchor="ctr"/>
+          <a:lstStyle/>
+          <a:p>
+            <a:pPr marL="0" indent="0" algn="ctr">
+              <a:buNone/>
+            </a:pPr>
+            <a:r>
+              <a:rPr lang="en-US" sz="900" dirty="0">
+                <a:solidFill>
+                  <a:srgbClr val="FFFFFF"/>
+                </a:solidFill>
+                <a:latin typeface="Calibri" pitchFamily="34" charset="0"/>
+                <a:ea typeface="Calibri" pitchFamily="34" charset="-122"/>
+                <a:cs typeface="Calibri" pitchFamily="34" charset="-120"/>
+              </a:rPr>
+              <a:t>Nhân khẩu học: LIMIT_BAL, SEX, EDUCATION, MARRIAGE, AGE</a:t>
+            </a:r>
+            <a:endParaRPr lang="en-US" sz="900" dirty="0"/>
+          </a:p>
+        </p:txBody>
+      </p:sp>
+      <p:sp>
+        <p:nvSpPr>
+          <p:cNvPr id="21" name="Shape 16"/>
+          <p:cNvSpPr/>
+          <p:nvPr/>
+        </p:nvSpPr>
+        <p:spPr>
+          <a:xfrm>
+            <a:off x="4463644" y="2450592"/>
+            <a:ext cx="2055571" cy="310896"/>
+          </a:xfrm>
+          <a:prstGeom prst="roundRect">
+            <a:avLst>
+              <a:gd name="adj" fmla="val 50000"/>
+            </a:avLst>
+          </a:prstGeom>
+          <a:solidFill>
+            <a:srgbClr val="1F5FA8"/>
+          </a:solidFill>
+          <a:ln/>
+        </p:spPr>
+      </p:sp>
+      <p:sp>
+        <p:nvSpPr>
+          <p:cNvPr id="22" name="Text 17"/>
+          <p:cNvSpPr/>
+          <p:nvPr/>
+        </p:nvSpPr>
+        <p:spPr>
+          <a:xfrm>
+            <a:off x="4463644" y="2450592"/>
+            <a:ext cx="2055571" cy="310896"/>
+          </a:xfrm>
+          <a:prstGeom prst="rect">
+            <a:avLst/>
+          </a:prstGeom>
+          <a:noFill/>
+          <a:ln/>
+        </p:spPr>
+        <p:txBody>
+          <a:bodyPr wrap="square" rtlCol="0" anchor="ctr"/>
+          <a:lstStyle/>
+          <a:p>
+            <a:pPr marL="0" indent="0" algn="ctr">
+              <a:buNone/>
+            </a:pPr>
+            <a:r>
+              <a:rPr lang="en-US" sz="900" dirty="0">
+                <a:solidFill>
+                  <a:srgbClr val="FFFFFF"/>
+                </a:solidFill>
+                <a:latin typeface="Calibri" pitchFamily="34" charset="0"/>
+                <a:ea typeface="Calibri" pitchFamily="34" charset="-122"/>
+                <a:cs typeface="Calibri" pitchFamily="34" charset="-120"/>
+              </a:rPr>
+              <a:t>Lịch sử trả nợ: PAY_1 – PAY_6</a:t>
+            </a:r>
+            <a:endParaRPr lang="en-US" sz="900" dirty="0"/>
+          </a:p>
+        </p:txBody>
+      </p:sp>
+      <p:sp>
+        <p:nvSpPr>
+          <p:cNvPr id="23" name="Shape 18"/>
+          <p:cNvSpPr/>
+          <p:nvPr/>
+        </p:nvSpPr>
+        <p:spPr>
+          <a:xfrm>
+            <a:off x="6665519" y="2450592"/>
+            <a:ext cx="1989734" cy="310896"/>
+          </a:xfrm>
+          <a:prstGeom prst="roundRect">
+            <a:avLst>
+              <a:gd name="adj" fmla="val 50000"/>
+            </a:avLst>
+          </a:prstGeom>
+          <a:solidFill>
+            <a:srgbClr val="1F5FA8"/>
+          </a:solidFill>
+          <a:ln/>
+        </p:spPr>
+      </p:sp>
+      <p:sp>
+        <p:nvSpPr>
+          <p:cNvPr id="24" name="Text 19"/>
+          <p:cNvSpPr/>
+          <p:nvPr/>
+        </p:nvSpPr>
+        <p:spPr>
+          <a:xfrm>
+            <a:off x="6665519" y="2450592"/>
+            <a:ext cx="1989734" cy="310896"/>
+          </a:xfrm>
+          <a:prstGeom prst="rect">
+            <a:avLst/>
+          </a:prstGeom>
+          <a:noFill/>
+          <a:ln/>
+        </p:spPr>
+        <p:txBody>
+          <a:bodyPr wrap="square" rtlCol="0" anchor="ctr"/>
+          <a:lstStyle/>
+          <a:p>
+            <a:pPr marL="0" indent="0" algn="ctr">
+              <a:buNone/>
+            </a:pPr>
+            <a:r>
+              <a:rPr lang="en-US" sz="900" dirty="0">
+                <a:solidFill>
+                  <a:srgbClr val="FFFFFF"/>
+                </a:solidFill>
+                <a:latin typeface="Calibri" pitchFamily="34" charset="0"/>
+                <a:ea typeface="Calibri" pitchFamily="34" charset="-122"/>
+                <a:cs typeface="Calibri" pitchFamily="34" charset="-120"/>
+              </a:rPr>
+              <a:t>Dư nợ hoá đơn: BILL_AMT1 – 6</a:t>
+            </a:r>
+            <a:endParaRPr lang="en-US" sz="900" dirty="0"/>
+          </a:p>
+        </p:txBody>
+      </p:sp>
+      <p:sp>
+        <p:nvSpPr>
+          <p:cNvPr id="25" name="Shape 20"/>
+          <p:cNvSpPr/>
+          <p:nvPr/>
+        </p:nvSpPr>
+        <p:spPr>
+          <a:xfrm>
+            <a:off x="8801557" y="2450592"/>
+            <a:ext cx="1726387" cy="310896"/>
+          </a:xfrm>
+          <a:prstGeom prst="roundRect">
+            <a:avLst>
+              <a:gd name="adj" fmla="val 50000"/>
+            </a:avLst>
+          </a:prstGeom>
+          <a:solidFill>
+            <a:srgbClr val="1F5FA8"/>
+          </a:solidFill>
+          <a:ln/>
+        </p:spPr>
+      </p:sp>
+      <p:sp>
+        <p:nvSpPr>
+          <p:cNvPr id="26" name="Text 21"/>
+          <p:cNvSpPr/>
+          <p:nvPr/>
+        </p:nvSpPr>
+        <p:spPr>
+          <a:xfrm>
+            <a:off x="8801557" y="2450592"/>
+            <a:ext cx="1726387" cy="310896"/>
+          </a:xfrm>
+          <a:prstGeom prst="rect">
+            <a:avLst/>
+          </a:prstGeom>
+          <a:noFill/>
+          <a:ln/>
+        </p:spPr>
+        <p:txBody>
+          <a:bodyPr wrap="square" rtlCol="0" anchor="ctr"/>
+          <a:lstStyle/>
+          <a:p>
+            <a:pPr marL="0" indent="0" algn="ctr">
+              <a:buNone/>
+            </a:pPr>
+            <a:r>
+              <a:rPr lang="en-US" sz="900" dirty="0">
+                <a:solidFill>
+                  <a:srgbClr val="FFFFFF"/>
+                </a:solidFill>
+                <a:latin typeface="Calibri" pitchFamily="34" charset="0"/>
+                <a:ea typeface="Calibri" pitchFamily="34" charset="-122"/>
+                <a:cs typeface="Calibri" pitchFamily="34" charset="-120"/>
+              </a:rPr>
+              <a:t>Thanh toán: PAY_AMT1 – 6</a:t>
+            </a:r>
+            <a:endParaRPr lang="en-US" sz="900" dirty="0"/>
+          </a:p>
+        </p:txBody>
+      </p:sp>
+      <p:sp>
+        <p:nvSpPr>
+          <p:cNvPr id="27" name="Text 22"/>
+          <p:cNvSpPr/>
+          <p:nvPr/>
+        </p:nvSpPr>
+        <p:spPr>
+          <a:xfrm>
+            <a:off x="548640" y="3035808"/>
+            <a:ext cx="11091672" cy="320040"/>
+          </a:xfrm>
+          <a:prstGeom prst="rect">
+            <a:avLst/>
+          </a:prstGeom>
+          <a:noFill/>
+          <a:ln/>
+        </p:spPr>
+        <p:txBody>
+          <a:bodyPr wrap="square" rtlCol="0" anchor="ctr"/>
+          <a:lstStyle/>
+          <a:p>
+            <a:pPr marL="0" indent="0">
+              <a:buNone/>
+            </a:pPr>
+            <a:r>
+              <a:rPr lang="en-US" sz="1200" b="1" dirty="0">
+                <a:solidFill>
+                  <a:srgbClr val="1F5FA8"/>
+                </a:solidFill>
+                <a:latin typeface="Calibri" pitchFamily="34" charset="0"/>
+                <a:ea typeface="Calibri" pitchFamily="34" charset="-122"/>
+                <a:cs typeface="Calibri" pitchFamily="34" charset="-120"/>
+              </a:rPr>
+              <a:t>QUY TRÌNH XỬ LÝ (PIPELINE)</a:t>
+            </a:r>
+            <a:endParaRPr lang="en-US" sz="1200" dirty="0"/>
+          </a:p>
+        </p:txBody>
+      </p:sp>
+      <p:sp>
+        <p:nvSpPr>
+          <p:cNvPr id="28" name="Shape 23"/>
+          <p:cNvSpPr/>
+          <p:nvPr/>
+        </p:nvSpPr>
+        <p:spPr>
+          <a:xfrm>
+            <a:off x="764896" y="3456432"/>
             <a:ext cx="2514600" cy="1417320"/>
           </a:xfrm>
           <a:prstGeom prst="roundRect">
@@ -3364,7 +2749,7 @@
           </a:solidFill>
           <a:ln/>
           <a:effectLst>
-            <a:outerShdw sx="100000" sy="100000" kx="0" ky="0" algn="bl" rotWithShape="0" blurRad="63500" dist="25400" dir="5400000">
+            <a:outerShdw blurRad="63500" dist="25400" dir="5400000" algn="bl" rotWithShape="0">
               <a:srgbClr val="9DB6D6">
                 <a:alpha val="30000"/>
               </a:srgbClr>
@@ -3374,13 +2759,13 @@
       </p:sp>
       <p:sp>
         <p:nvSpPr>
-          <p:cNvPr id="43" name="Shape 36"/>
-          <p:cNvSpPr/>
-          <p:nvPr/>
-        </p:nvSpPr>
-        <p:spPr>
-          <a:xfrm>
-            <a:off x="8326984" y="3511296"/>
+          <p:cNvPr id="29" name="Shape 24"/>
+          <p:cNvSpPr/>
+          <p:nvPr/>
+        </p:nvSpPr>
+        <p:spPr>
+          <a:xfrm>
+            <a:off x="2895448" y="3511296"/>
             <a:ext cx="292608" cy="292608"/>
           </a:xfrm>
           <a:prstGeom prst="ellipse">
@@ -3394,13 +2779,13 @@
       </p:sp>
       <p:sp>
         <p:nvSpPr>
-          <p:cNvPr id="44" name="Text 37"/>
-          <p:cNvSpPr/>
-          <p:nvPr/>
-        </p:nvSpPr>
-        <p:spPr>
-          <a:xfrm>
-            <a:off x="8326984" y="3511296"/>
+          <p:cNvPr id="30" name="Text 25"/>
+          <p:cNvSpPr/>
+          <p:nvPr/>
+        </p:nvSpPr>
+        <p:spPr>
+          <a:xfrm>
+            <a:off x="2895448" y="3511296"/>
             <a:ext cx="292608" cy="292608"/>
           </a:xfrm>
           <a:prstGeom prst="rect">
@@ -3413,7 +2798,7 @@
           <a:bodyPr wrap="square" rtlCol="0" anchor="ctr"/>
           <a:lstStyle/>
           <a:p>
-            <a:pPr algn="ctr" indent="0" marL="0">
+            <a:pPr marL="0" indent="0" algn="ctr">
               <a:buNone/>
             </a:pPr>
             <a:r>
@@ -3425,7 +2810,7 @@
                 <a:ea typeface="Calibri" pitchFamily="34" charset="-122"/>
                 <a:cs typeface="Calibri" pitchFamily="34" charset="-120"/>
               </a:rPr>
-              <a:t>3</a:t>
+              <a:t>1</a:t>
             </a:r>
             <a:endParaRPr lang="en-US" sz="1200" dirty="0"/>
           </a:p>
@@ -3433,13 +2818,13 @@
       </p:sp>
       <p:sp>
         <p:nvSpPr>
-          <p:cNvPr id="45" name="Shape 38"/>
-          <p:cNvSpPr/>
-          <p:nvPr/>
-        </p:nvSpPr>
-        <p:spPr>
-          <a:xfrm>
-            <a:off x="7170268" y="3621024"/>
+          <p:cNvPr id="31" name="Shape 26"/>
+          <p:cNvSpPr/>
+          <p:nvPr/>
+        </p:nvSpPr>
+        <p:spPr>
+          <a:xfrm>
+            <a:off x="1738732" y="3621024"/>
             <a:ext cx="566928" cy="566928"/>
           </a:xfrm>
           <a:prstGeom prst="ellipse">
@@ -3453,7 +2838,7 @@
       </p:sp>
       <p:pic>
         <p:nvPicPr>
-          <p:cNvPr id="46" name="Image 5" descr="step_branch.png">    </p:cNvPr>
+          <p:cNvPr id="32" name="Image 3" descr="step_filter.png"/>
           <p:cNvPicPr>
             <a:picLocks noChangeAspect="1"/>
           </p:cNvPicPr>
@@ -3467,7 +2852,7 @@
         </p:blipFill>
         <p:spPr>
           <a:xfrm>
-            <a:off x="7243968" y="3694725"/>
+            <a:off x="1812432" y="3694725"/>
             <a:ext cx="419527" cy="419527"/>
           </a:xfrm>
           <a:prstGeom prst="rect">
@@ -3477,13 +2862,13 @@
       </p:pic>
       <p:sp>
         <p:nvSpPr>
-          <p:cNvPr id="47" name="Text 39"/>
-          <p:cNvSpPr/>
-          <p:nvPr/>
-        </p:nvSpPr>
-        <p:spPr>
-          <a:xfrm>
-            <a:off x="6306160" y="4325112"/>
+          <p:cNvPr id="33" name="Text 27"/>
+          <p:cNvSpPr/>
+          <p:nvPr/>
+        </p:nvSpPr>
+        <p:spPr>
+          <a:xfrm>
+            <a:off x="874624" y="4325112"/>
             <a:ext cx="2295144" cy="502920"/>
           </a:xfrm>
           <a:prstGeom prst="rect">
@@ -3496,7 +2881,7 @@
           <a:bodyPr wrap="square" rtlCol="0" anchor="t"/>
           <a:lstStyle/>
           <a:p>
-            <a:pPr algn="ctr" indent="0" marL="0">
+            <a:pPr marL="0" indent="0" algn="ctr">
               <a:lnSpc>
                 <a:spcPct val="105000"/>
               </a:lnSpc>
@@ -3511,7 +2896,7 @@
                 <a:ea typeface="Calibri" pitchFamily="34" charset="-122"/>
                 <a:cs typeface="Calibri" pitchFamily="34" charset="-120"/>
               </a:rPr>
-              <a:t>Train / Val / Test Split</a:t>
+              <a:t>Làm sạch dữ liệu</a:t>
             </a:r>
             <a:endParaRPr lang="en-US" sz="1150" dirty="0"/>
           </a:p>
@@ -3519,13 +2904,13 @@
       </p:sp>
       <p:sp>
         <p:nvSpPr>
-          <p:cNvPr id="48" name="Shape 40"/>
-          <p:cNvSpPr/>
-          <p:nvPr/>
-        </p:nvSpPr>
-        <p:spPr>
-          <a:xfrm>
-            <a:off x="8747242" y="4046220"/>
+          <p:cNvPr id="34" name="Shape 28"/>
+          <p:cNvSpPr/>
+          <p:nvPr/>
+        </p:nvSpPr>
+        <p:spPr>
+          <a:xfrm>
+            <a:off x="3315706" y="4046220"/>
             <a:ext cx="128748" cy="237744"/>
           </a:xfrm>
           <a:prstGeom prst="chevron">
@@ -3539,13 +2924,13 @@
       </p:sp>
       <p:sp>
         <p:nvSpPr>
-          <p:cNvPr id="49" name="Shape 41"/>
-          <p:cNvSpPr/>
-          <p:nvPr/>
-        </p:nvSpPr>
-        <p:spPr>
-          <a:xfrm>
-            <a:off x="8912200" y="3456432"/>
+          <p:cNvPr id="35" name="Shape 29"/>
+          <p:cNvSpPr/>
+          <p:nvPr/>
+        </p:nvSpPr>
+        <p:spPr>
+          <a:xfrm>
+            <a:off x="3480664" y="3456432"/>
             <a:ext cx="2514600" cy="1417320"/>
           </a:xfrm>
           <a:prstGeom prst="roundRect">
@@ -3558,7 +2943,7 @@
           </a:solidFill>
           <a:ln/>
           <a:effectLst>
-            <a:outerShdw sx="100000" sy="100000" kx="0" ky="0" algn="bl" rotWithShape="0" blurRad="63500" dist="25400" dir="5400000">
+            <a:outerShdw blurRad="63500" dist="25400" dir="5400000" algn="bl" rotWithShape="0">
               <a:srgbClr val="9DB6D6">
                 <a:alpha val="30000"/>
               </a:srgbClr>
@@ -3568,13 +2953,13 @@
       </p:sp>
       <p:sp>
         <p:nvSpPr>
-          <p:cNvPr id="50" name="Shape 42"/>
-          <p:cNvSpPr/>
-          <p:nvPr/>
-        </p:nvSpPr>
-        <p:spPr>
-          <a:xfrm>
-            <a:off x="11042752" y="3511296"/>
+          <p:cNvPr id="36" name="Shape 30"/>
+          <p:cNvSpPr/>
+          <p:nvPr/>
+        </p:nvSpPr>
+        <p:spPr>
+          <a:xfrm>
+            <a:off x="5611216" y="3511296"/>
             <a:ext cx="292608" cy="292608"/>
           </a:xfrm>
           <a:prstGeom prst="ellipse">
@@ -3588,13 +2973,13 @@
       </p:sp>
       <p:sp>
         <p:nvSpPr>
-          <p:cNvPr id="51" name="Text 43"/>
-          <p:cNvSpPr/>
-          <p:nvPr/>
-        </p:nvSpPr>
-        <p:spPr>
-          <a:xfrm>
-            <a:off x="11042752" y="3511296"/>
+          <p:cNvPr id="37" name="Text 31"/>
+          <p:cNvSpPr/>
+          <p:nvPr/>
+        </p:nvSpPr>
+        <p:spPr>
+          <a:xfrm>
+            <a:off x="5611216" y="3511296"/>
             <a:ext cx="292608" cy="292608"/>
           </a:xfrm>
           <a:prstGeom prst="rect">
@@ -3607,7 +2992,7 @@
           <a:bodyPr wrap="square" rtlCol="0" anchor="ctr"/>
           <a:lstStyle/>
           <a:p>
-            <a:pPr algn="ctr" indent="0" marL="0">
+            <a:pPr marL="0" indent="0" algn="ctr">
               <a:buNone/>
             </a:pPr>
             <a:r>
@@ -3619,7 +3004,7 @@
                 <a:ea typeface="Calibri" pitchFamily="34" charset="-122"/>
                 <a:cs typeface="Calibri" pitchFamily="34" charset="-120"/>
               </a:rPr>
-              <a:t>4</a:t>
+              <a:t>2</a:t>
             </a:r>
             <a:endParaRPr lang="en-US" sz="1200" dirty="0"/>
           </a:p>
@@ -3627,13 +3012,13 @@
       </p:sp>
       <p:sp>
         <p:nvSpPr>
-          <p:cNvPr id="52" name="Shape 44"/>
-          <p:cNvSpPr/>
-          <p:nvPr/>
-        </p:nvSpPr>
-        <p:spPr>
-          <a:xfrm>
-            <a:off x="9886036" y="3621024"/>
+          <p:cNvPr id="38" name="Shape 32"/>
+          <p:cNvSpPr/>
+          <p:nvPr/>
+        </p:nvSpPr>
+        <p:spPr>
+          <a:xfrm>
+            <a:off x="4454500" y="3621024"/>
             <a:ext cx="566928" cy="566928"/>
           </a:xfrm>
           <a:prstGeom prst="ellipse">
@@ -3647,7 +3032,7 @@
       </p:sp>
       <p:pic>
         <p:nvPicPr>
-          <p:cNvPr id="53" name="Image 6" descr="step_cpu.png">    </p:cNvPr>
+          <p:cNvPr id="39" name="Image 4" descr="step_sliders.png"/>
           <p:cNvPicPr>
             <a:picLocks noChangeAspect="1"/>
           </p:cNvPicPr>
@@ -3661,7 +3046,7 @@
         </p:blipFill>
         <p:spPr>
           <a:xfrm>
-            <a:off x="9959736" y="3694725"/>
+            <a:off x="4528200" y="3694725"/>
             <a:ext cx="419527" cy="419527"/>
           </a:xfrm>
           <a:prstGeom prst="rect">
@@ -3671,13 +3056,13 @@
       </p:pic>
       <p:sp>
         <p:nvSpPr>
-          <p:cNvPr id="54" name="Text 45"/>
-          <p:cNvSpPr/>
-          <p:nvPr/>
-        </p:nvSpPr>
-        <p:spPr>
-          <a:xfrm>
-            <a:off x="9021928" y="4325112"/>
+          <p:cNvPr id="40" name="Text 33"/>
+          <p:cNvSpPr/>
+          <p:nvPr/>
+        </p:nvSpPr>
+        <p:spPr>
+          <a:xfrm>
+            <a:off x="3590392" y="4325112"/>
             <a:ext cx="2295144" cy="502920"/>
           </a:xfrm>
           <a:prstGeom prst="rect">
@@ -3690,7 +3075,395 @@
           <a:bodyPr wrap="square" rtlCol="0" anchor="t"/>
           <a:lstStyle/>
           <a:p>
-            <a:pPr algn="ctr" indent="0" marL="0">
+            <a:pPr marL="0" indent="0" algn="ctr">
+              <a:lnSpc>
+                <a:spcPct val="105000"/>
+              </a:lnSpc>
+              <a:buNone/>
+            </a:pPr>
+            <a:r>
+              <a:rPr lang="en-US" sz="1150" b="1" dirty="0">
+                <a:solidFill>
+                  <a:srgbClr val="0E2A47"/>
+                </a:solidFill>
+                <a:latin typeface="Calibri" pitchFamily="34" charset="0"/>
+                <a:ea typeface="Calibri" pitchFamily="34" charset="-122"/>
+                <a:cs typeface="Calibri" pitchFamily="34" charset="-120"/>
+              </a:rPr>
+              <a:t>Feature Engineering</a:t>
+            </a:r>
+            <a:endParaRPr lang="en-US" sz="1150" dirty="0"/>
+          </a:p>
+        </p:txBody>
+      </p:sp>
+      <p:sp>
+        <p:nvSpPr>
+          <p:cNvPr id="41" name="Shape 34"/>
+          <p:cNvSpPr/>
+          <p:nvPr/>
+        </p:nvSpPr>
+        <p:spPr>
+          <a:xfrm>
+            <a:off x="6031474" y="4046220"/>
+            <a:ext cx="128748" cy="237744"/>
+          </a:xfrm>
+          <a:prstGeom prst="chevron">
+            <a:avLst/>
+          </a:prstGeom>
+          <a:solidFill>
+            <a:srgbClr val="1F5FA8"/>
+          </a:solidFill>
+          <a:ln/>
+        </p:spPr>
+      </p:sp>
+      <p:sp>
+        <p:nvSpPr>
+          <p:cNvPr id="42" name="Shape 35"/>
+          <p:cNvSpPr/>
+          <p:nvPr/>
+        </p:nvSpPr>
+        <p:spPr>
+          <a:xfrm>
+            <a:off x="6196432" y="3456432"/>
+            <a:ext cx="2514600" cy="1417320"/>
+          </a:xfrm>
+          <a:prstGeom prst="roundRect">
+            <a:avLst>
+              <a:gd name="adj" fmla="val 5161"/>
+            </a:avLst>
+          </a:prstGeom>
+          <a:solidFill>
+            <a:srgbClr val="EAF2FB"/>
+          </a:solidFill>
+          <a:ln/>
+          <a:effectLst>
+            <a:outerShdw blurRad="63500" dist="25400" dir="5400000" algn="bl" rotWithShape="0">
+              <a:srgbClr val="9DB6D6">
+                <a:alpha val="30000"/>
+              </a:srgbClr>
+            </a:outerShdw>
+          </a:effectLst>
+        </p:spPr>
+      </p:sp>
+      <p:sp>
+        <p:nvSpPr>
+          <p:cNvPr id="43" name="Shape 36"/>
+          <p:cNvSpPr/>
+          <p:nvPr/>
+        </p:nvSpPr>
+        <p:spPr>
+          <a:xfrm>
+            <a:off x="8326984" y="3511296"/>
+            <a:ext cx="292608" cy="292608"/>
+          </a:xfrm>
+          <a:prstGeom prst="ellipse">
+            <a:avLst/>
+          </a:prstGeom>
+          <a:solidFill>
+            <a:srgbClr val="0E2A47"/>
+          </a:solidFill>
+          <a:ln/>
+        </p:spPr>
+      </p:sp>
+      <p:sp>
+        <p:nvSpPr>
+          <p:cNvPr id="44" name="Text 37"/>
+          <p:cNvSpPr/>
+          <p:nvPr/>
+        </p:nvSpPr>
+        <p:spPr>
+          <a:xfrm>
+            <a:off x="8326984" y="3511296"/>
+            <a:ext cx="292608" cy="292608"/>
+          </a:xfrm>
+          <a:prstGeom prst="rect">
+            <a:avLst/>
+          </a:prstGeom>
+          <a:noFill/>
+          <a:ln/>
+        </p:spPr>
+        <p:txBody>
+          <a:bodyPr wrap="square" rtlCol="0" anchor="ctr"/>
+          <a:lstStyle/>
+          <a:p>
+            <a:pPr marL="0" indent="0" algn="ctr">
+              <a:buNone/>
+            </a:pPr>
+            <a:r>
+              <a:rPr lang="en-US" sz="1200" b="1" dirty="0">
+                <a:solidFill>
+                  <a:srgbClr val="FFFFFF"/>
+                </a:solidFill>
+                <a:latin typeface="Calibri" pitchFamily="34" charset="0"/>
+                <a:ea typeface="Calibri" pitchFamily="34" charset="-122"/>
+                <a:cs typeface="Calibri" pitchFamily="34" charset="-120"/>
+              </a:rPr>
+              <a:t>3</a:t>
+            </a:r>
+            <a:endParaRPr lang="en-US" sz="1200" dirty="0"/>
+          </a:p>
+        </p:txBody>
+      </p:sp>
+      <p:sp>
+        <p:nvSpPr>
+          <p:cNvPr id="45" name="Shape 38"/>
+          <p:cNvSpPr/>
+          <p:nvPr/>
+        </p:nvSpPr>
+        <p:spPr>
+          <a:xfrm>
+            <a:off x="7170268" y="3621024"/>
+            <a:ext cx="566928" cy="566928"/>
+          </a:xfrm>
+          <a:prstGeom prst="ellipse">
+            <a:avLst/>
+          </a:prstGeom>
+          <a:solidFill>
+            <a:srgbClr val="1F5FA8"/>
+          </a:solidFill>
+          <a:ln/>
+        </p:spPr>
+      </p:sp>
+      <p:pic>
+        <p:nvPicPr>
+          <p:cNvPr id="46" name="Image 5" descr="step_branch.png"/>
+          <p:cNvPicPr>
+            <a:picLocks noChangeAspect="1"/>
+          </p:cNvPicPr>
+          <p:nvPr/>
+        </p:nvPicPr>
+        <p:blipFill>
+          <a:blip r:embed="rId8"/>
+          <a:stretch>
+            <a:fillRect/>
+          </a:stretch>
+        </p:blipFill>
+        <p:spPr>
+          <a:xfrm>
+            <a:off x="7243968" y="3694725"/>
+            <a:ext cx="419527" cy="419527"/>
+          </a:xfrm>
+          <a:prstGeom prst="rect">
+            <a:avLst/>
+          </a:prstGeom>
+        </p:spPr>
+      </p:pic>
+      <p:sp>
+        <p:nvSpPr>
+          <p:cNvPr id="47" name="Text 39"/>
+          <p:cNvSpPr/>
+          <p:nvPr/>
+        </p:nvSpPr>
+        <p:spPr>
+          <a:xfrm>
+            <a:off x="6306160" y="4325112"/>
+            <a:ext cx="2295144" cy="502920"/>
+          </a:xfrm>
+          <a:prstGeom prst="rect">
+            <a:avLst/>
+          </a:prstGeom>
+          <a:noFill/>
+          <a:ln/>
+        </p:spPr>
+        <p:txBody>
+          <a:bodyPr wrap="square" rtlCol="0" anchor="t"/>
+          <a:lstStyle/>
+          <a:p>
+            <a:pPr marL="0" indent="0" algn="ctr">
+              <a:lnSpc>
+                <a:spcPct val="105000"/>
+              </a:lnSpc>
+              <a:buNone/>
+            </a:pPr>
+            <a:r>
+              <a:rPr lang="en-US" sz="1150" b="1" dirty="0">
+                <a:solidFill>
+                  <a:srgbClr val="0E2A47"/>
+                </a:solidFill>
+                <a:latin typeface="Calibri" pitchFamily="34" charset="0"/>
+                <a:ea typeface="Calibri" pitchFamily="34" charset="-122"/>
+                <a:cs typeface="Calibri" pitchFamily="34" charset="-120"/>
+              </a:rPr>
+              <a:t>Train / Val / Test Split</a:t>
+            </a:r>
+            <a:endParaRPr lang="en-US" sz="1150" dirty="0"/>
+          </a:p>
+        </p:txBody>
+      </p:sp>
+      <p:sp>
+        <p:nvSpPr>
+          <p:cNvPr id="48" name="Shape 40"/>
+          <p:cNvSpPr/>
+          <p:nvPr/>
+        </p:nvSpPr>
+        <p:spPr>
+          <a:xfrm>
+            <a:off x="8747242" y="4046220"/>
+            <a:ext cx="128748" cy="237744"/>
+          </a:xfrm>
+          <a:prstGeom prst="chevron">
+            <a:avLst/>
+          </a:prstGeom>
+          <a:solidFill>
+            <a:srgbClr val="1F5FA8"/>
+          </a:solidFill>
+          <a:ln/>
+        </p:spPr>
+      </p:sp>
+      <p:sp>
+        <p:nvSpPr>
+          <p:cNvPr id="49" name="Shape 41"/>
+          <p:cNvSpPr/>
+          <p:nvPr/>
+        </p:nvSpPr>
+        <p:spPr>
+          <a:xfrm>
+            <a:off x="8912200" y="3456432"/>
+            <a:ext cx="2514600" cy="1417320"/>
+          </a:xfrm>
+          <a:prstGeom prst="roundRect">
+            <a:avLst>
+              <a:gd name="adj" fmla="val 5161"/>
+            </a:avLst>
+          </a:prstGeom>
+          <a:solidFill>
+            <a:srgbClr val="EAF2FB"/>
+          </a:solidFill>
+          <a:ln/>
+          <a:effectLst>
+            <a:outerShdw blurRad="63500" dist="25400" dir="5400000" algn="bl" rotWithShape="0">
+              <a:srgbClr val="9DB6D6">
+                <a:alpha val="30000"/>
+              </a:srgbClr>
+            </a:outerShdw>
+          </a:effectLst>
+        </p:spPr>
+      </p:sp>
+      <p:sp>
+        <p:nvSpPr>
+          <p:cNvPr id="50" name="Shape 42"/>
+          <p:cNvSpPr/>
+          <p:nvPr/>
+        </p:nvSpPr>
+        <p:spPr>
+          <a:xfrm>
+            <a:off x="11042752" y="3511296"/>
+            <a:ext cx="292608" cy="292608"/>
+          </a:xfrm>
+          <a:prstGeom prst="ellipse">
+            <a:avLst/>
+          </a:prstGeom>
+          <a:solidFill>
+            <a:srgbClr val="0E2A47"/>
+          </a:solidFill>
+          <a:ln/>
+        </p:spPr>
+      </p:sp>
+      <p:sp>
+        <p:nvSpPr>
+          <p:cNvPr id="51" name="Text 43"/>
+          <p:cNvSpPr/>
+          <p:nvPr/>
+        </p:nvSpPr>
+        <p:spPr>
+          <a:xfrm>
+            <a:off x="11042752" y="3511296"/>
+            <a:ext cx="292608" cy="292608"/>
+          </a:xfrm>
+          <a:prstGeom prst="rect">
+            <a:avLst/>
+          </a:prstGeom>
+          <a:noFill/>
+          <a:ln/>
+        </p:spPr>
+        <p:txBody>
+          <a:bodyPr wrap="square" rtlCol="0" anchor="ctr"/>
+          <a:lstStyle/>
+          <a:p>
+            <a:pPr marL="0" indent="0" algn="ctr">
+              <a:buNone/>
+            </a:pPr>
+            <a:r>
+              <a:rPr lang="en-US" sz="1200" b="1" dirty="0">
+                <a:solidFill>
+                  <a:srgbClr val="FFFFFF"/>
+                </a:solidFill>
+                <a:latin typeface="Calibri" pitchFamily="34" charset="0"/>
+                <a:ea typeface="Calibri" pitchFamily="34" charset="-122"/>
+                <a:cs typeface="Calibri" pitchFamily="34" charset="-120"/>
+              </a:rPr>
+              <a:t>4</a:t>
+            </a:r>
+            <a:endParaRPr lang="en-US" sz="1200" dirty="0"/>
+          </a:p>
+        </p:txBody>
+      </p:sp>
+      <p:sp>
+        <p:nvSpPr>
+          <p:cNvPr id="52" name="Shape 44"/>
+          <p:cNvSpPr/>
+          <p:nvPr/>
+        </p:nvSpPr>
+        <p:spPr>
+          <a:xfrm>
+            <a:off x="9886036" y="3621024"/>
+            <a:ext cx="566928" cy="566928"/>
+          </a:xfrm>
+          <a:prstGeom prst="ellipse">
+            <a:avLst/>
+          </a:prstGeom>
+          <a:solidFill>
+            <a:srgbClr val="1F5FA8"/>
+          </a:solidFill>
+          <a:ln/>
+        </p:spPr>
+      </p:sp>
+      <p:pic>
+        <p:nvPicPr>
+          <p:cNvPr id="53" name="Image 6" descr="step_cpu.png"/>
+          <p:cNvPicPr>
+            <a:picLocks noChangeAspect="1"/>
+          </p:cNvPicPr>
+          <p:nvPr/>
+        </p:nvPicPr>
+        <p:blipFill>
+          <a:blip r:embed="rId9"/>
+          <a:stretch>
+            <a:fillRect/>
+          </a:stretch>
+        </p:blipFill>
+        <p:spPr>
+          <a:xfrm>
+            <a:off x="9959736" y="3694725"/>
+            <a:ext cx="419527" cy="419527"/>
+          </a:xfrm>
+          <a:prstGeom prst="rect">
+            <a:avLst/>
+          </a:prstGeom>
+        </p:spPr>
+      </p:pic>
+      <p:sp>
+        <p:nvSpPr>
+          <p:cNvPr id="54" name="Text 45"/>
+          <p:cNvSpPr/>
+          <p:nvPr/>
+        </p:nvSpPr>
+        <p:spPr>
+          <a:xfrm>
+            <a:off x="9021928" y="4325112"/>
+            <a:ext cx="2295144" cy="502920"/>
+          </a:xfrm>
+          <a:prstGeom prst="rect">
+            <a:avLst/>
+          </a:prstGeom>
+          <a:noFill/>
+          <a:ln/>
+        </p:spPr>
+        <p:txBody>
+          <a:bodyPr wrap="square" rtlCol="0" anchor="t"/>
+          <a:lstStyle/>
+          <a:p>
+            <a:pPr marL="0" indent="0" algn="ctr">
               <a:lnSpc>
                 <a:spcPct val="105000"/>
               </a:lnSpc>
@@ -3802,7 +3575,7 @@
           </a:solidFill>
           <a:ln/>
           <a:effectLst>
-            <a:outerShdw sx="100000" sy="100000" kx="0" ky="0" algn="bl" rotWithShape="0" blurRad="63500" dist="25400" dir="5400000">
+            <a:outerShdw blurRad="63500" dist="25400" dir="5400000" algn="bl" rotWithShape="0">
               <a:srgbClr val="9DB6D6">
                 <a:alpha val="30000"/>
               </a:srgbClr>
@@ -3851,7 +3624,7 @@
           <a:bodyPr wrap="square" rtlCol="0" anchor="ctr"/>
           <a:lstStyle/>
           <a:p>
-            <a:pPr algn="ctr" indent="0" marL="0">
+            <a:pPr marL="0" indent="0" algn="ctr">
               <a:buNone/>
             </a:pPr>
             <a:r>
@@ -3891,395 +3664,7 @@
       </p:sp>
       <p:pic>
         <p:nvPicPr>
-          <p:cNvPr id="62" name="Image 7" descr="step_chart.png">    </p:cNvPr>
-          <p:cNvPicPr>
-            <a:picLocks noChangeAspect="1"/>
-          </p:cNvPicPr>
-          <p:nvPr/>
-        </p:nvPicPr>
-        <p:blipFill>
-          <a:blip r:embed="rId8"/>
-          <a:stretch>
-            <a:fillRect/>
-          </a:stretch>
-        </p:blipFill>
-        <p:spPr>
-          <a:xfrm>
-            <a:off x="3170316" y="5496093"/>
-            <a:ext cx="419527" cy="419527"/>
-          </a:xfrm>
-          <a:prstGeom prst="rect">
-            <a:avLst/>
-          </a:prstGeom>
-        </p:spPr>
-      </p:pic>
-      <p:sp>
-        <p:nvSpPr>
-          <p:cNvPr id="63" name="Text 53"/>
-          <p:cNvSpPr/>
-          <p:nvPr/>
-        </p:nvSpPr>
-        <p:spPr>
-          <a:xfrm>
-            <a:off x="2232508" y="6126480"/>
-            <a:ext cx="2295144" cy="502920"/>
-          </a:xfrm>
-          <a:prstGeom prst="rect">
-            <a:avLst/>
-          </a:prstGeom>
-          <a:noFill/>
-          <a:ln/>
-        </p:spPr>
-        <p:txBody>
-          <a:bodyPr wrap="square" rtlCol="0" anchor="t"/>
-          <a:lstStyle/>
-          <a:p>
-            <a:pPr algn="ctr" indent="0" marL="0">
-              <a:lnSpc>
-                <a:spcPct val="105000"/>
-              </a:lnSpc>
-              <a:buNone/>
-            </a:pPr>
-            <a:r>
-              <a:rPr lang="en-US" sz="1150" b="1" dirty="0">
-                <a:solidFill>
-                  <a:srgbClr val="0E2A47"/>
-                </a:solidFill>
-                <a:latin typeface="Calibri" pitchFamily="34" charset="0"/>
-                <a:ea typeface="Calibri" pitchFamily="34" charset="-122"/>
-                <a:cs typeface="Calibri" pitchFamily="34" charset="-120"/>
-              </a:rPr>
-              <a:t>Đánh giá &amp; so sánh paper gốc</a:t>
-            </a:r>
-            <a:endParaRPr lang="en-US" sz="1150" dirty="0"/>
-          </a:p>
-        </p:txBody>
-      </p:sp>
-      <p:sp>
-        <p:nvSpPr>
-          <p:cNvPr id="64" name="Shape 54"/>
-          <p:cNvSpPr/>
-          <p:nvPr/>
-        </p:nvSpPr>
-        <p:spPr>
-          <a:xfrm>
-            <a:off x="4673590" y="5847588"/>
-            <a:ext cx="128748" cy="237744"/>
-          </a:xfrm>
-          <a:prstGeom prst="chevron">
-            <a:avLst/>
-          </a:prstGeom>
-          <a:solidFill>
-            <a:srgbClr val="1F5FA8"/>
-          </a:solidFill>
-          <a:ln/>
-        </p:spPr>
-      </p:sp>
-      <p:sp>
-        <p:nvSpPr>
-          <p:cNvPr id="65" name="Shape 55"/>
-          <p:cNvSpPr/>
-          <p:nvPr/>
-        </p:nvSpPr>
-        <p:spPr>
-          <a:xfrm>
-            <a:off x="4838548" y="5257800"/>
-            <a:ext cx="2514600" cy="1417320"/>
-          </a:xfrm>
-          <a:prstGeom prst="roundRect">
-            <a:avLst>
-              <a:gd name="adj" fmla="val 5161"/>
-            </a:avLst>
-          </a:prstGeom>
-          <a:solidFill>
-            <a:srgbClr val="EAF2FB"/>
-          </a:solidFill>
-          <a:ln/>
-          <a:effectLst>
-            <a:outerShdw sx="100000" sy="100000" kx="0" ky="0" algn="bl" rotWithShape="0" blurRad="63500" dist="25400" dir="5400000">
-              <a:srgbClr val="9DB6D6">
-                <a:alpha val="30000"/>
-              </a:srgbClr>
-            </a:outerShdw>
-          </a:effectLst>
-        </p:spPr>
-      </p:sp>
-      <p:sp>
-        <p:nvSpPr>
-          <p:cNvPr id="66" name="Shape 56"/>
-          <p:cNvSpPr/>
-          <p:nvPr/>
-        </p:nvSpPr>
-        <p:spPr>
-          <a:xfrm>
-            <a:off x="6969100" y="5312664"/>
-            <a:ext cx="292608" cy="292608"/>
-          </a:xfrm>
-          <a:prstGeom prst="ellipse">
-            <a:avLst/>
-          </a:prstGeom>
-          <a:solidFill>
-            <a:srgbClr val="0E2A47"/>
-          </a:solidFill>
-          <a:ln/>
-        </p:spPr>
-      </p:sp>
-      <p:sp>
-        <p:nvSpPr>
-          <p:cNvPr id="67" name="Text 57"/>
-          <p:cNvSpPr/>
-          <p:nvPr/>
-        </p:nvSpPr>
-        <p:spPr>
-          <a:xfrm>
-            <a:off x="6969100" y="5312664"/>
-            <a:ext cx="292608" cy="292608"/>
-          </a:xfrm>
-          <a:prstGeom prst="rect">
-            <a:avLst/>
-          </a:prstGeom>
-          <a:noFill/>
-          <a:ln/>
-        </p:spPr>
-        <p:txBody>
-          <a:bodyPr wrap="square" rtlCol="0" anchor="ctr"/>
-          <a:lstStyle/>
-          <a:p>
-            <a:pPr algn="ctr" indent="0" marL="0">
-              <a:buNone/>
-            </a:pPr>
-            <a:r>
-              <a:rPr lang="en-US" sz="1200" b="1" dirty="0">
-                <a:solidFill>
-                  <a:srgbClr val="FFFFFF"/>
-                </a:solidFill>
-                <a:latin typeface="Calibri" pitchFamily="34" charset="0"/>
-                <a:ea typeface="Calibri" pitchFamily="34" charset="-122"/>
-                <a:cs typeface="Calibri" pitchFamily="34" charset="-120"/>
-              </a:rPr>
-              <a:t>6</a:t>
-            </a:r>
-            <a:endParaRPr lang="en-US" sz="1200" dirty="0"/>
-          </a:p>
-        </p:txBody>
-      </p:sp>
-      <p:sp>
-        <p:nvSpPr>
-          <p:cNvPr id="68" name="Shape 58"/>
-          <p:cNvSpPr/>
-          <p:nvPr/>
-        </p:nvSpPr>
-        <p:spPr>
-          <a:xfrm>
-            <a:off x="5812384" y="5422392"/>
-            <a:ext cx="566928" cy="566928"/>
-          </a:xfrm>
-          <a:prstGeom prst="ellipse">
-            <a:avLst/>
-          </a:prstGeom>
-          <a:solidFill>
-            <a:srgbClr val="1F5FA8"/>
-          </a:solidFill>
-          <a:ln/>
-        </p:spPr>
-      </p:sp>
-      <p:pic>
-        <p:nvPicPr>
-          <p:cNvPr id="69" name="Image 8" descr="step_eye.png">    </p:cNvPr>
-          <p:cNvPicPr>
-            <a:picLocks noChangeAspect="1"/>
-          </p:cNvPicPr>
-          <p:nvPr/>
-        </p:nvPicPr>
-        <p:blipFill>
-          <a:blip r:embed="rId9"/>
-          <a:stretch>
-            <a:fillRect/>
-          </a:stretch>
-        </p:blipFill>
-        <p:spPr>
-          <a:xfrm>
-            <a:off x="5886084" y="5496093"/>
-            <a:ext cx="419527" cy="419527"/>
-          </a:xfrm>
-          <a:prstGeom prst="rect">
-            <a:avLst/>
-          </a:prstGeom>
-        </p:spPr>
-      </p:pic>
-      <p:sp>
-        <p:nvSpPr>
-          <p:cNvPr id="70" name="Text 59"/>
-          <p:cNvSpPr/>
-          <p:nvPr/>
-        </p:nvSpPr>
-        <p:spPr>
-          <a:xfrm>
-            <a:off x="4948276" y="6126480"/>
-            <a:ext cx="2295144" cy="502920"/>
-          </a:xfrm>
-          <a:prstGeom prst="rect">
-            <a:avLst/>
-          </a:prstGeom>
-          <a:noFill/>
-          <a:ln/>
-        </p:spPr>
-        <p:txBody>
-          <a:bodyPr wrap="square" rtlCol="0" anchor="t"/>
-          <a:lstStyle/>
-          <a:p>
-            <a:pPr algn="ctr" indent="0" marL="0">
-              <a:lnSpc>
-                <a:spcPct val="105000"/>
-              </a:lnSpc>
-              <a:buNone/>
-            </a:pPr>
-            <a:r>
-              <a:rPr lang="en-US" sz="1150" b="1" dirty="0">
-                <a:solidFill>
-                  <a:srgbClr val="0E2A47"/>
-                </a:solidFill>
-                <a:latin typeface="Calibri" pitchFamily="34" charset="0"/>
-                <a:ea typeface="Calibri" pitchFamily="34" charset="-122"/>
-                <a:cs typeface="Calibri" pitchFamily="34" charset="-120"/>
-              </a:rPr>
-              <a:t>Diễn giải SHAP</a:t>
-            </a:r>
-            <a:endParaRPr lang="en-US" sz="1150" dirty="0"/>
-          </a:p>
-        </p:txBody>
-      </p:sp>
-      <p:sp>
-        <p:nvSpPr>
-          <p:cNvPr id="71" name="Shape 60"/>
-          <p:cNvSpPr/>
-          <p:nvPr/>
-        </p:nvSpPr>
-        <p:spPr>
-          <a:xfrm>
-            <a:off x="7389358" y="5847588"/>
-            <a:ext cx="128748" cy="237744"/>
-          </a:xfrm>
-          <a:prstGeom prst="chevron">
-            <a:avLst/>
-          </a:prstGeom>
-          <a:solidFill>
-            <a:srgbClr val="1F5FA8"/>
-          </a:solidFill>
-          <a:ln/>
-        </p:spPr>
-      </p:sp>
-      <p:sp>
-        <p:nvSpPr>
-          <p:cNvPr id="72" name="Shape 61"/>
-          <p:cNvSpPr/>
-          <p:nvPr/>
-        </p:nvSpPr>
-        <p:spPr>
-          <a:xfrm>
-            <a:off x="7554316" y="5257800"/>
-            <a:ext cx="2514600" cy="1417320"/>
-          </a:xfrm>
-          <a:prstGeom prst="roundRect">
-            <a:avLst>
-              <a:gd name="adj" fmla="val 5161"/>
-            </a:avLst>
-          </a:prstGeom>
-          <a:solidFill>
-            <a:srgbClr val="EAF2FB"/>
-          </a:solidFill>
-          <a:ln/>
-          <a:effectLst>
-            <a:outerShdw sx="100000" sy="100000" kx="0" ky="0" algn="bl" rotWithShape="0" blurRad="63500" dist="25400" dir="5400000">
-              <a:srgbClr val="9DB6D6">
-                <a:alpha val="30000"/>
-              </a:srgbClr>
-            </a:outerShdw>
-          </a:effectLst>
-        </p:spPr>
-      </p:sp>
-      <p:sp>
-        <p:nvSpPr>
-          <p:cNvPr id="73" name="Shape 62"/>
-          <p:cNvSpPr/>
-          <p:nvPr/>
-        </p:nvSpPr>
-        <p:spPr>
-          <a:xfrm>
-            <a:off x="9684868" y="5312664"/>
-            <a:ext cx="292608" cy="292608"/>
-          </a:xfrm>
-          <a:prstGeom prst="ellipse">
-            <a:avLst/>
-          </a:prstGeom>
-          <a:solidFill>
-            <a:srgbClr val="0E2A47"/>
-          </a:solidFill>
-          <a:ln/>
-        </p:spPr>
-      </p:sp>
-      <p:sp>
-        <p:nvSpPr>
-          <p:cNvPr id="74" name="Text 63"/>
-          <p:cNvSpPr/>
-          <p:nvPr/>
-        </p:nvSpPr>
-        <p:spPr>
-          <a:xfrm>
-            <a:off x="9684868" y="5312664"/>
-            <a:ext cx="292608" cy="292608"/>
-          </a:xfrm>
-          <a:prstGeom prst="rect">
-            <a:avLst/>
-          </a:prstGeom>
-          <a:noFill/>
-          <a:ln/>
-        </p:spPr>
-        <p:txBody>
-          <a:bodyPr wrap="square" rtlCol="0" anchor="ctr"/>
-          <a:lstStyle/>
-          <a:p>
-            <a:pPr algn="ctr" indent="0" marL="0">
-              <a:buNone/>
-            </a:pPr>
-            <a:r>
-              <a:rPr lang="en-US" sz="1200" b="1" dirty="0">
-                <a:solidFill>
-                  <a:srgbClr val="FFFFFF"/>
-                </a:solidFill>
-                <a:latin typeface="Calibri" pitchFamily="34" charset="0"/>
-                <a:ea typeface="Calibri" pitchFamily="34" charset="-122"/>
-                <a:cs typeface="Calibri" pitchFamily="34" charset="-120"/>
-              </a:rPr>
-              <a:t>7</a:t>
-            </a:r>
-            <a:endParaRPr lang="en-US" sz="1200" dirty="0"/>
-          </a:p>
-        </p:txBody>
-      </p:sp>
-      <p:sp>
-        <p:nvSpPr>
-          <p:cNvPr id="75" name="Shape 64"/>
-          <p:cNvSpPr/>
-          <p:nvPr/>
-        </p:nvSpPr>
-        <p:spPr>
-          <a:xfrm>
-            <a:off x="8528152" y="5422392"/>
-            <a:ext cx="566928" cy="566928"/>
-          </a:xfrm>
-          <a:prstGeom prst="ellipse">
-            <a:avLst/>
-          </a:prstGeom>
-          <a:solidFill>
-            <a:srgbClr val="1F5FA8"/>
-          </a:solidFill>
-          <a:ln/>
-        </p:spPr>
-      </p:sp>
-      <p:pic>
-        <p:nvPicPr>
-          <p:cNvPr id="76" name="Image 9" descr="step_trend.png">    </p:cNvPr>
+          <p:cNvPr id="62" name="Image 7" descr="step_chart.png"/>
           <p:cNvPicPr>
             <a:picLocks noChangeAspect="1"/>
           </p:cNvPicPr>
@@ -4293,7 +3678,7 @@
         </p:blipFill>
         <p:spPr>
           <a:xfrm>
-            <a:off x="8601852" y="5496093"/>
+            <a:off x="3170316" y="5496093"/>
             <a:ext cx="419527" cy="419527"/>
           </a:xfrm>
           <a:prstGeom prst="rect">
@@ -4303,13 +3688,13 @@
       </p:pic>
       <p:sp>
         <p:nvSpPr>
-          <p:cNvPr id="77" name="Text 65"/>
-          <p:cNvSpPr/>
-          <p:nvPr/>
-        </p:nvSpPr>
-        <p:spPr>
-          <a:xfrm>
-            <a:off x="7664044" y="6126480"/>
+          <p:cNvPr id="63" name="Text 53"/>
+          <p:cNvSpPr/>
+          <p:nvPr/>
+        </p:nvSpPr>
+        <p:spPr>
+          <a:xfrm>
+            <a:off x="2232508" y="6126480"/>
             <a:ext cx="2295144" cy="502920"/>
           </a:xfrm>
           <a:prstGeom prst="rect">
@@ -4322,7 +3707,395 @@
           <a:bodyPr wrap="square" rtlCol="0" anchor="t"/>
           <a:lstStyle/>
           <a:p>
-            <a:pPr algn="ctr" indent="0" marL="0">
+            <a:pPr marL="0" indent="0" algn="ctr">
+              <a:lnSpc>
+                <a:spcPct val="105000"/>
+              </a:lnSpc>
+              <a:buNone/>
+            </a:pPr>
+            <a:r>
+              <a:rPr lang="en-US" sz="1150" b="1" dirty="0">
+                <a:solidFill>
+                  <a:srgbClr val="0E2A47"/>
+                </a:solidFill>
+                <a:latin typeface="Calibri" pitchFamily="34" charset="0"/>
+                <a:ea typeface="Calibri" pitchFamily="34" charset="-122"/>
+                <a:cs typeface="Calibri" pitchFamily="34" charset="-120"/>
+              </a:rPr>
+              <a:t>Đánh giá &amp; so sánh paper gốc</a:t>
+            </a:r>
+            <a:endParaRPr lang="en-US" sz="1150" dirty="0"/>
+          </a:p>
+        </p:txBody>
+      </p:sp>
+      <p:sp>
+        <p:nvSpPr>
+          <p:cNvPr id="64" name="Shape 54"/>
+          <p:cNvSpPr/>
+          <p:nvPr/>
+        </p:nvSpPr>
+        <p:spPr>
+          <a:xfrm>
+            <a:off x="4673590" y="5847588"/>
+            <a:ext cx="128748" cy="237744"/>
+          </a:xfrm>
+          <a:prstGeom prst="chevron">
+            <a:avLst/>
+          </a:prstGeom>
+          <a:solidFill>
+            <a:srgbClr val="1F5FA8"/>
+          </a:solidFill>
+          <a:ln/>
+        </p:spPr>
+      </p:sp>
+      <p:sp>
+        <p:nvSpPr>
+          <p:cNvPr id="65" name="Shape 55"/>
+          <p:cNvSpPr/>
+          <p:nvPr/>
+        </p:nvSpPr>
+        <p:spPr>
+          <a:xfrm>
+            <a:off x="4838548" y="5257800"/>
+            <a:ext cx="2514600" cy="1417320"/>
+          </a:xfrm>
+          <a:prstGeom prst="roundRect">
+            <a:avLst>
+              <a:gd name="adj" fmla="val 5161"/>
+            </a:avLst>
+          </a:prstGeom>
+          <a:solidFill>
+            <a:srgbClr val="EAF2FB"/>
+          </a:solidFill>
+          <a:ln/>
+          <a:effectLst>
+            <a:outerShdw blurRad="63500" dist="25400" dir="5400000" algn="bl" rotWithShape="0">
+              <a:srgbClr val="9DB6D6">
+                <a:alpha val="30000"/>
+              </a:srgbClr>
+            </a:outerShdw>
+          </a:effectLst>
+        </p:spPr>
+      </p:sp>
+      <p:sp>
+        <p:nvSpPr>
+          <p:cNvPr id="66" name="Shape 56"/>
+          <p:cNvSpPr/>
+          <p:nvPr/>
+        </p:nvSpPr>
+        <p:spPr>
+          <a:xfrm>
+            <a:off x="6969100" y="5312664"/>
+            <a:ext cx="292608" cy="292608"/>
+          </a:xfrm>
+          <a:prstGeom prst="ellipse">
+            <a:avLst/>
+          </a:prstGeom>
+          <a:solidFill>
+            <a:srgbClr val="0E2A47"/>
+          </a:solidFill>
+          <a:ln/>
+        </p:spPr>
+      </p:sp>
+      <p:sp>
+        <p:nvSpPr>
+          <p:cNvPr id="67" name="Text 57"/>
+          <p:cNvSpPr/>
+          <p:nvPr/>
+        </p:nvSpPr>
+        <p:spPr>
+          <a:xfrm>
+            <a:off x="6969100" y="5312664"/>
+            <a:ext cx="292608" cy="292608"/>
+          </a:xfrm>
+          <a:prstGeom prst="rect">
+            <a:avLst/>
+          </a:prstGeom>
+          <a:noFill/>
+          <a:ln/>
+        </p:spPr>
+        <p:txBody>
+          <a:bodyPr wrap="square" rtlCol="0" anchor="ctr"/>
+          <a:lstStyle/>
+          <a:p>
+            <a:pPr marL="0" indent="0" algn="ctr">
+              <a:buNone/>
+            </a:pPr>
+            <a:r>
+              <a:rPr lang="en-US" sz="1200" b="1" dirty="0">
+                <a:solidFill>
+                  <a:srgbClr val="FFFFFF"/>
+                </a:solidFill>
+                <a:latin typeface="Calibri" pitchFamily="34" charset="0"/>
+                <a:ea typeface="Calibri" pitchFamily="34" charset="-122"/>
+                <a:cs typeface="Calibri" pitchFamily="34" charset="-120"/>
+              </a:rPr>
+              <a:t>6</a:t>
+            </a:r>
+            <a:endParaRPr lang="en-US" sz="1200" dirty="0"/>
+          </a:p>
+        </p:txBody>
+      </p:sp>
+      <p:sp>
+        <p:nvSpPr>
+          <p:cNvPr id="68" name="Shape 58"/>
+          <p:cNvSpPr/>
+          <p:nvPr/>
+        </p:nvSpPr>
+        <p:spPr>
+          <a:xfrm>
+            <a:off x="5812384" y="5422392"/>
+            <a:ext cx="566928" cy="566928"/>
+          </a:xfrm>
+          <a:prstGeom prst="ellipse">
+            <a:avLst/>
+          </a:prstGeom>
+          <a:solidFill>
+            <a:srgbClr val="1F5FA8"/>
+          </a:solidFill>
+          <a:ln/>
+        </p:spPr>
+      </p:sp>
+      <p:pic>
+        <p:nvPicPr>
+          <p:cNvPr id="69" name="Image 8" descr="step_eye.png"/>
+          <p:cNvPicPr>
+            <a:picLocks noChangeAspect="1"/>
+          </p:cNvPicPr>
+          <p:nvPr/>
+        </p:nvPicPr>
+        <p:blipFill>
+          <a:blip r:embed="rId11"/>
+          <a:stretch>
+            <a:fillRect/>
+          </a:stretch>
+        </p:blipFill>
+        <p:spPr>
+          <a:xfrm>
+            <a:off x="5886084" y="5496093"/>
+            <a:ext cx="419527" cy="419527"/>
+          </a:xfrm>
+          <a:prstGeom prst="rect">
+            <a:avLst/>
+          </a:prstGeom>
+        </p:spPr>
+      </p:pic>
+      <p:sp>
+        <p:nvSpPr>
+          <p:cNvPr id="70" name="Text 59"/>
+          <p:cNvSpPr/>
+          <p:nvPr/>
+        </p:nvSpPr>
+        <p:spPr>
+          <a:xfrm>
+            <a:off x="4948276" y="6126480"/>
+            <a:ext cx="2295144" cy="502920"/>
+          </a:xfrm>
+          <a:prstGeom prst="rect">
+            <a:avLst/>
+          </a:prstGeom>
+          <a:noFill/>
+          <a:ln/>
+        </p:spPr>
+        <p:txBody>
+          <a:bodyPr wrap="square" rtlCol="0" anchor="t"/>
+          <a:lstStyle/>
+          <a:p>
+            <a:pPr marL="0" indent="0" algn="ctr">
+              <a:lnSpc>
+                <a:spcPct val="105000"/>
+              </a:lnSpc>
+              <a:buNone/>
+            </a:pPr>
+            <a:r>
+              <a:rPr lang="en-US" sz="1150" b="1" dirty="0">
+                <a:solidFill>
+                  <a:srgbClr val="0E2A47"/>
+                </a:solidFill>
+                <a:latin typeface="Calibri" pitchFamily="34" charset="0"/>
+                <a:ea typeface="Calibri" pitchFamily="34" charset="-122"/>
+                <a:cs typeface="Calibri" pitchFamily="34" charset="-120"/>
+              </a:rPr>
+              <a:t>Diễn giải SHAP</a:t>
+            </a:r>
+            <a:endParaRPr lang="en-US" sz="1150" dirty="0"/>
+          </a:p>
+        </p:txBody>
+      </p:sp>
+      <p:sp>
+        <p:nvSpPr>
+          <p:cNvPr id="71" name="Shape 60"/>
+          <p:cNvSpPr/>
+          <p:nvPr/>
+        </p:nvSpPr>
+        <p:spPr>
+          <a:xfrm>
+            <a:off x="7389358" y="5847588"/>
+            <a:ext cx="128748" cy="237744"/>
+          </a:xfrm>
+          <a:prstGeom prst="chevron">
+            <a:avLst/>
+          </a:prstGeom>
+          <a:solidFill>
+            <a:srgbClr val="1F5FA8"/>
+          </a:solidFill>
+          <a:ln/>
+        </p:spPr>
+      </p:sp>
+      <p:sp>
+        <p:nvSpPr>
+          <p:cNvPr id="72" name="Shape 61"/>
+          <p:cNvSpPr/>
+          <p:nvPr/>
+        </p:nvSpPr>
+        <p:spPr>
+          <a:xfrm>
+            <a:off x="7554316" y="5257800"/>
+            <a:ext cx="2514600" cy="1417320"/>
+          </a:xfrm>
+          <a:prstGeom prst="roundRect">
+            <a:avLst>
+              <a:gd name="adj" fmla="val 5161"/>
+            </a:avLst>
+          </a:prstGeom>
+          <a:solidFill>
+            <a:srgbClr val="EAF2FB"/>
+          </a:solidFill>
+          <a:ln/>
+          <a:effectLst>
+            <a:outerShdw blurRad="63500" dist="25400" dir="5400000" algn="bl" rotWithShape="0">
+              <a:srgbClr val="9DB6D6">
+                <a:alpha val="30000"/>
+              </a:srgbClr>
+            </a:outerShdw>
+          </a:effectLst>
+        </p:spPr>
+      </p:sp>
+      <p:sp>
+        <p:nvSpPr>
+          <p:cNvPr id="73" name="Shape 62"/>
+          <p:cNvSpPr/>
+          <p:nvPr/>
+        </p:nvSpPr>
+        <p:spPr>
+          <a:xfrm>
+            <a:off x="9684868" y="5312664"/>
+            <a:ext cx="292608" cy="292608"/>
+          </a:xfrm>
+          <a:prstGeom prst="ellipse">
+            <a:avLst/>
+          </a:prstGeom>
+          <a:solidFill>
+            <a:srgbClr val="0E2A47"/>
+          </a:solidFill>
+          <a:ln/>
+        </p:spPr>
+      </p:sp>
+      <p:sp>
+        <p:nvSpPr>
+          <p:cNvPr id="74" name="Text 63"/>
+          <p:cNvSpPr/>
+          <p:nvPr/>
+        </p:nvSpPr>
+        <p:spPr>
+          <a:xfrm>
+            <a:off x="9684868" y="5312664"/>
+            <a:ext cx="292608" cy="292608"/>
+          </a:xfrm>
+          <a:prstGeom prst="rect">
+            <a:avLst/>
+          </a:prstGeom>
+          <a:noFill/>
+          <a:ln/>
+        </p:spPr>
+        <p:txBody>
+          <a:bodyPr wrap="square" rtlCol="0" anchor="ctr"/>
+          <a:lstStyle/>
+          <a:p>
+            <a:pPr marL="0" indent="0" algn="ctr">
+              <a:buNone/>
+            </a:pPr>
+            <a:r>
+              <a:rPr lang="en-US" sz="1200" b="1" dirty="0">
+                <a:solidFill>
+                  <a:srgbClr val="FFFFFF"/>
+                </a:solidFill>
+                <a:latin typeface="Calibri" pitchFamily="34" charset="0"/>
+                <a:ea typeface="Calibri" pitchFamily="34" charset="-122"/>
+                <a:cs typeface="Calibri" pitchFamily="34" charset="-120"/>
+              </a:rPr>
+              <a:t>7</a:t>
+            </a:r>
+            <a:endParaRPr lang="en-US" sz="1200" dirty="0"/>
+          </a:p>
+        </p:txBody>
+      </p:sp>
+      <p:sp>
+        <p:nvSpPr>
+          <p:cNvPr id="75" name="Shape 64"/>
+          <p:cNvSpPr/>
+          <p:nvPr/>
+        </p:nvSpPr>
+        <p:spPr>
+          <a:xfrm>
+            <a:off x="8528152" y="5422392"/>
+            <a:ext cx="566928" cy="566928"/>
+          </a:xfrm>
+          <a:prstGeom prst="ellipse">
+            <a:avLst/>
+          </a:prstGeom>
+          <a:solidFill>
+            <a:srgbClr val="1F5FA8"/>
+          </a:solidFill>
+          <a:ln/>
+        </p:spPr>
+      </p:sp>
+      <p:pic>
+        <p:nvPicPr>
+          <p:cNvPr id="76" name="Image 9" descr="step_trend.png"/>
+          <p:cNvPicPr>
+            <a:picLocks noChangeAspect="1"/>
+          </p:cNvPicPr>
+          <p:nvPr/>
+        </p:nvPicPr>
+        <p:blipFill>
+          <a:blip r:embed="rId12"/>
+          <a:stretch>
+            <a:fillRect/>
+          </a:stretch>
+        </p:blipFill>
+        <p:spPr>
+          <a:xfrm>
+            <a:off x="8601852" y="5496093"/>
+            <a:ext cx="419527" cy="419527"/>
+          </a:xfrm>
+          <a:prstGeom prst="rect">
+            <a:avLst/>
+          </a:prstGeom>
+        </p:spPr>
+      </p:pic>
+      <p:sp>
+        <p:nvSpPr>
+          <p:cNvPr id="77" name="Text 65"/>
+          <p:cNvSpPr/>
+          <p:nvPr/>
+        </p:nvSpPr>
+        <p:spPr>
+          <a:xfrm>
+            <a:off x="7664044" y="6126480"/>
+            <a:ext cx="2295144" cy="502920"/>
+          </a:xfrm>
+          <a:prstGeom prst="rect">
+            <a:avLst/>
+          </a:prstGeom>
+          <a:noFill/>
+          <a:ln/>
+        </p:spPr>
+        <p:txBody>
+          <a:bodyPr wrap="square" rtlCol="0" anchor="t"/>
+          <a:lstStyle/>
+          <a:p>
+            <a:pPr marL="0" indent="0" algn="ctr">
               <a:lnSpc>
                 <a:spcPct val="105000"/>
               </a:lnSpc>
@@ -4359,6 +4132,7 @@
         <a:solidFill>
           <a:srgbClr val="FFFFFF"/>
         </a:solidFill>
+        <a:effectLst/>
       </p:bgPr>
     </p:bg>
     <p:spTree>
@@ -4396,7 +4170,7 @@
           <a:bodyPr wrap="square" rtlCol="0" anchor="ctr"/>
           <a:lstStyle/>
           <a:p>
-            <a:pPr indent="0" marL="0">
+            <a:pPr marL="0" indent="0">
               <a:buNone/>
             </a:pPr>
             <a:r>
@@ -4408,7 +4182,7 @@
                 <a:ea typeface="Cambria" pitchFamily="34" charset="-122"/>
                 <a:cs typeface="Cambria" pitchFamily="34" charset="-120"/>
               </a:rPr>
-              <a:t>TECH STACK</a:t>
+              <a:t>ĐỊNH HƯỚNG PHÁT TRIỂN</a:t>
             </a:r>
             <a:endParaRPr lang="en-US" sz="3000" dirty="0"/>
           </a:p>
@@ -4422,12 +4196,12 @@
         </p:nvSpPr>
         <p:spPr>
           <a:xfrm>
-            <a:off x="548640" y="1280160"/>
-            <a:ext cx="3514344" cy="1572768"/>
+            <a:off x="548640" y="1170432"/>
+            <a:ext cx="11091672" cy="1536192"/>
           </a:xfrm>
           <a:prstGeom prst="roundRect">
             <a:avLst>
-              <a:gd name="adj" fmla="val 4651"/>
+              <a:gd name="adj" fmla="val 4762"/>
             </a:avLst>
           </a:prstGeom>
           <a:solidFill>
@@ -4435,9 +4209,9 @@
           </a:solidFill>
           <a:ln/>
           <a:effectLst>
-            <a:outerShdw sx="100000" sy="100000" kx="0" ky="0" algn="bl" rotWithShape="0" blurRad="63500" dist="25400" dir="5400000">
+            <a:outerShdw blurRad="76200" dist="25400" dir="5400000" algn="bl" rotWithShape="0">
               <a:srgbClr val="9DB6D6">
-                <a:alpha val="30000"/>
+                <a:alpha val="35000"/>
               </a:srgbClr>
             </a:outerShdw>
           </a:effectLst>
@@ -4451,8 +4225,8 @@
         </p:nvSpPr>
         <p:spPr>
           <a:xfrm>
-            <a:off x="2031492" y="1444752"/>
-            <a:ext cx="548640" cy="548640"/>
+            <a:off x="868680" y="1549908"/>
+            <a:ext cx="777240" cy="777240"/>
           </a:xfrm>
           <a:prstGeom prst="ellipse">
             <a:avLst/>
@@ -4465,315 +4239,7 @@
       </p:sp>
       <p:pic>
         <p:nvPicPr>
-          <p:cNvPr id="5" name="Image 0" descr="tech_python.png">    </p:cNvPr>
-          <p:cNvPicPr>
-            <a:picLocks noChangeAspect="1"/>
-          </p:cNvPicPr>
-          <p:nvPr/>
-        </p:nvPicPr>
-        <p:blipFill>
-          <a:blip r:embed="rId1"/>
-          <a:stretch>
-            <a:fillRect/>
-          </a:stretch>
-        </p:blipFill>
-        <p:spPr>
-          <a:xfrm>
-            <a:off x="2102815" y="1516075"/>
-            <a:ext cx="405994" cy="405994"/>
-          </a:xfrm>
-          <a:prstGeom prst="rect">
-            <a:avLst/>
-          </a:prstGeom>
-        </p:spPr>
-      </p:pic>
-      <p:sp>
-        <p:nvSpPr>
-          <p:cNvPr id="6" name="Text 3"/>
-          <p:cNvSpPr/>
-          <p:nvPr/>
-        </p:nvSpPr>
-        <p:spPr>
-          <a:xfrm>
-            <a:off x="658368" y="2121408"/>
-            <a:ext cx="3294888" cy="347472"/>
-          </a:xfrm>
-          <a:prstGeom prst="rect">
-            <a:avLst/>
-          </a:prstGeom>
-          <a:noFill/>
-          <a:ln/>
-        </p:spPr>
-        <p:txBody>
-          <a:bodyPr wrap="square" rtlCol="0" anchor="ctr"/>
-          <a:lstStyle/>
-          <a:p>
-            <a:pPr algn="ctr" indent="0" marL="0">
-              <a:buNone/>
-            </a:pPr>
-            <a:r>
-              <a:rPr lang="en-US" sz="1350" b="1" dirty="0">
-                <a:solidFill>
-                  <a:srgbClr val="0E2A47"/>
-                </a:solidFill>
-                <a:latin typeface="Cambria" pitchFamily="34" charset="0"/>
-                <a:ea typeface="Cambria" pitchFamily="34" charset="-122"/>
-                <a:cs typeface="Cambria" pitchFamily="34" charset="-120"/>
-              </a:rPr>
-              <a:t>Python 3.13</a:t>
-            </a:r>
-            <a:endParaRPr lang="en-US" sz="1350" dirty="0"/>
-          </a:p>
-        </p:txBody>
-      </p:sp>
-      <p:sp>
-        <p:nvSpPr>
-          <p:cNvPr id="7" name="Text 4"/>
-          <p:cNvSpPr/>
-          <p:nvPr/>
-        </p:nvSpPr>
-        <p:spPr>
-          <a:xfrm>
-            <a:off x="676656" y="2450592"/>
-            <a:ext cx="3258312" cy="365760"/>
-          </a:xfrm>
-          <a:prstGeom prst="rect">
-            <a:avLst/>
-          </a:prstGeom>
-          <a:noFill/>
-          <a:ln/>
-        </p:spPr>
-        <p:txBody>
-          <a:bodyPr wrap="square" rtlCol="0" anchor="t"/>
-          <a:lstStyle/>
-          <a:p>
-            <a:pPr algn="ctr" indent="0" marL="0">
-              <a:lnSpc>
-                <a:spcPct val="105000"/>
-              </a:lnSpc>
-              <a:buNone/>
-            </a:pPr>
-            <a:r>
-              <a:rPr lang="en-US" sz="950" dirty="0">
-                <a:solidFill>
-                  <a:srgbClr val="5B7290"/>
-                </a:solidFill>
-                <a:latin typeface="Calibri" pitchFamily="34" charset="0"/>
-                <a:ea typeface="Calibri" pitchFamily="34" charset="-122"/>
-                <a:cs typeface="Calibri" pitchFamily="34" charset="-120"/>
-              </a:rPr>
-              <a:t>Ngôn ngữ lập trình chính</a:t>
-            </a:r>
-            <a:endParaRPr lang="en-US" sz="950" dirty="0"/>
-          </a:p>
-        </p:txBody>
-      </p:sp>
-      <p:sp>
-        <p:nvSpPr>
-          <p:cNvPr id="8" name="Shape 5"/>
-          <p:cNvSpPr/>
-          <p:nvPr/>
-        </p:nvSpPr>
-        <p:spPr>
-          <a:xfrm>
-            <a:off x="4337304" y="1280160"/>
-            <a:ext cx="3514344" cy="1572768"/>
-          </a:xfrm>
-          <a:prstGeom prst="roundRect">
-            <a:avLst>
-              <a:gd name="adj" fmla="val 4651"/>
-            </a:avLst>
-          </a:prstGeom>
-          <a:solidFill>
-            <a:srgbClr val="EAF2FB"/>
-          </a:solidFill>
-          <a:ln/>
-          <a:effectLst>
-            <a:outerShdw sx="100000" sy="100000" kx="0" ky="0" algn="bl" rotWithShape="0" blurRad="63500" dist="25400" dir="5400000">
-              <a:srgbClr val="9DB6D6">
-                <a:alpha val="30000"/>
-              </a:srgbClr>
-            </a:outerShdw>
-          </a:effectLst>
-        </p:spPr>
-      </p:sp>
-      <p:sp>
-        <p:nvSpPr>
-          <p:cNvPr id="9" name="Shape 6"/>
-          <p:cNvSpPr/>
-          <p:nvPr/>
-        </p:nvSpPr>
-        <p:spPr>
-          <a:xfrm>
-            <a:off x="5820156" y="1444752"/>
-            <a:ext cx="548640" cy="548640"/>
-          </a:xfrm>
-          <a:prstGeom prst="ellipse">
-            <a:avLst/>
-          </a:prstGeom>
-          <a:solidFill>
-            <a:srgbClr val="1F5FA8"/>
-          </a:solidFill>
-          <a:ln/>
-        </p:spPr>
-      </p:sp>
-      <p:pic>
-        <p:nvPicPr>
-          <p:cNvPr id="10" name="Image 1" descr="tech_pandas.png">    </p:cNvPr>
-          <p:cNvPicPr>
-            <a:picLocks noChangeAspect="1"/>
-          </p:cNvPicPr>
-          <p:nvPr/>
-        </p:nvPicPr>
-        <p:blipFill>
-          <a:blip r:embed="rId2"/>
-          <a:stretch>
-            <a:fillRect/>
-          </a:stretch>
-        </p:blipFill>
-        <p:spPr>
-          <a:xfrm>
-            <a:off x="5891479" y="1516075"/>
-            <a:ext cx="405994" cy="405994"/>
-          </a:xfrm>
-          <a:prstGeom prst="rect">
-            <a:avLst/>
-          </a:prstGeom>
-        </p:spPr>
-      </p:pic>
-      <p:sp>
-        <p:nvSpPr>
-          <p:cNvPr id="11" name="Text 7"/>
-          <p:cNvSpPr/>
-          <p:nvPr/>
-        </p:nvSpPr>
-        <p:spPr>
-          <a:xfrm>
-            <a:off x="4447032" y="2121408"/>
-            <a:ext cx="3294888" cy="347472"/>
-          </a:xfrm>
-          <a:prstGeom prst="rect">
-            <a:avLst/>
-          </a:prstGeom>
-          <a:noFill/>
-          <a:ln/>
-        </p:spPr>
-        <p:txBody>
-          <a:bodyPr wrap="square" rtlCol="0" anchor="ctr"/>
-          <a:lstStyle/>
-          <a:p>
-            <a:pPr algn="ctr" indent="0" marL="0">
-              <a:buNone/>
-            </a:pPr>
-            <a:r>
-              <a:rPr lang="en-US" sz="1350" b="1" dirty="0">
-                <a:solidFill>
-                  <a:srgbClr val="0E2A47"/>
-                </a:solidFill>
-                <a:latin typeface="Cambria" pitchFamily="34" charset="0"/>
-                <a:ea typeface="Cambria" pitchFamily="34" charset="-122"/>
-                <a:cs typeface="Cambria" pitchFamily="34" charset="-120"/>
-              </a:rPr>
-              <a:t>pandas &amp; NumPy</a:t>
-            </a:r>
-            <a:endParaRPr lang="en-US" sz="1350" dirty="0"/>
-          </a:p>
-        </p:txBody>
-      </p:sp>
-      <p:sp>
-        <p:nvSpPr>
-          <p:cNvPr id="12" name="Text 8"/>
-          <p:cNvSpPr/>
-          <p:nvPr/>
-        </p:nvSpPr>
-        <p:spPr>
-          <a:xfrm>
-            <a:off x="4465320" y="2450592"/>
-            <a:ext cx="3258312" cy="365760"/>
-          </a:xfrm>
-          <a:prstGeom prst="rect">
-            <a:avLst/>
-          </a:prstGeom>
-          <a:noFill/>
-          <a:ln/>
-        </p:spPr>
-        <p:txBody>
-          <a:bodyPr wrap="square" rtlCol="0" anchor="t"/>
-          <a:lstStyle/>
-          <a:p>
-            <a:pPr algn="ctr" indent="0" marL="0">
-              <a:lnSpc>
-                <a:spcPct val="105000"/>
-              </a:lnSpc>
-              <a:buNone/>
-            </a:pPr>
-            <a:r>
-              <a:rPr lang="en-US" sz="950" dirty="0">
-                <a:solidFill>
-                  <a:srgbClr val="5B7290"/>
-                </a:solidFill>
-                <a:latin typeface="Calibri" pitchFamily="34" charset="0"/>
-                <a:ea typeface="Calibri" pitchFamily="34" charset="-122"/>
-                <a:cs typeface="Calibri" pitchFamily="34" charset="-120"/>
-              </a:rPr>
-              <a:t>Xử lý &amp; biến đổi dữ liệu</a:t>
-            </a:r>
-            <a:endParaRPr lang="en-US" sz="950" dirty="0"/>
-          </a:p>
-        </p:txBody>
-      </p:sp>
-      <p:sp>
-        <p:nvSpPr>
-          <p:cNvPr id="13" name="Shape 9"/>
-          <p:cNvSpPr/>
-          <p:nvPr/>
-        </p:nvSpPr>
-        <p:spPr>
-          <a:xfrm>
-            <a:off x="8125968" y="1280160"/>
-            <a:ext cx="3514344" cy="1572768"/>
-          </a:xfrm>
-          <a:prstGeom prst="roundRect">
-            <a:avLst>
-              <a:gd name="adj" fmla="val 4651"/>
-            </a:avLst>
-          </a:prstGeom>
-          <a:solidFill>
-            <a:srgbClr val="EAF2FB"/>
-          </a:solidFill>
-          <a:ln/>
-          <a:effectLst>
-            <a:outerShdw sx="100000" sy="100000" kx="0" ky="0" algn="bl" rotWithShape="0" blurRad="63500" dist="25400" dir="5400000">
-              <a:srgbClr val="9DB6D6">
-                <a:alpha val="30000"/>
-              </a:srgbClr>
-            </a:outerShdw>
-          </a:effectLst>
-        </p:spPr>
-      </p:sp>
-      <p:sp>
-        <p:nvSpPr>
-          <p:cNvPr id="14" name="Shape 10"/>
-          <p:cNvSpPr/>
-          <p:nvPr/>
-        </p:nvSpPr>
-        <p:spPr>
-          <a:xfrm>
-            <a:off x="9608820" y="1444752"/>
-            <a:ext cx="548640" cy="548640"/>
-          </a:xfrm>
-          <a:prstGeom prst="ellipse">
-            <a:avLst/>
-          </a:prstGeom>
-          <a:solidFill>
-            <a:srgbClr val="1F5FA8"/>
-          </a:solidFill>
-          <a:ln/>
-        </p:spPr>
-      </p:sp>
-      <p:pic>
-        <p:nvPicPr>
-          <p:cNvPr id="15" name="Image 2" descr="tech_sklearn.png">    </p:cNvPr>
+          <p:cNvPr id="5" name="Image 0" descr="research.png"/>
           <p:cNvPicPr>
             <a:picLocks noChangeAspect="1"/>
           </p:cNvPicPr>
@@ -4787,8 +4253,8 @@
         </p:blipFill>
         <p:spPr>
           <a:xfrm>
-            <a:off x="9680143" y="1516075"/>
-            <a:ext cx="405994" cy="405994"/>
+            <a:off x="969721" y="1650949"/>
+            <a:ext cx="575158" cy="575158"/>
           </a:xfrm>
           <a:prstGeom prst="rect">
             <a:avLst/>
@@ -4797,14 +4263,14 @@
       </p:pic>
       <p:sp>
         <p:nvSpPr>
-          <p:cNvPr id="16" name="Text 11"/>
-          <p:cNvSpPr/>
-          <p:nvPr/>
-        </p:nvSpPr>
-        <p:spPr>
-          <a:xfrm>
-            <a:off x="8235696" y="2121408"/>
-            <a:ext cx="3294888" cy="347472"/>
+          <p:cNvPr id="6" name="Text 3"/>
+          <p:cNvSpPr/>
+          <p:nvPr/>
+        </p:nvSpPr>
+        <p:spPr>
+          <a:xfrm>
+            <a:off x="1965960" y="1316736"/>
+            <a:ext cx="9308592" cy="365760"/>
           </a:xfrm>
           <a:prstGeom prst="rect">
             <a:avLst/>
@@ -4816,11 +4282,11 @@
           <a:bodyPr wrap="square" rtlCol="0" anchor="ctr"/>
           <a:lstStyle/>
           <a:p>
-            <a:pPr algn="ctr" indent="0" marL="0">
+            <a:pPr marL="0" indent="0">
               <a:buNone/>
             </a:pPr>
             <a:r>
-              <a:rPr lang="en-US" sz="1350" b="1" dirty="0">
+              <a:rPr lang="en-US" sz="1700" b="1" dirty="0">
                 <a:solidFill>
                   <a:srgbClr val="0E2A47"/>
                 </a:solidFill>
@@ -4828,22 +4294,22 @@
                 <a:ea typeface="Cambria" pitchFamily="34" charset="-122"/>
                 <a:cs typeface="Cambria" pitchFamily="34" charset="-120"/>
               </a:rPr>
-              <a:t>scikit-learn</a:t>
-            </a:r>
-            <a:endParaRPr lang="en-US" sz="1350" dirty="0"/>
+              <a:t>Research — Nghiên cứu mở rộng</a:t>
+            </a:r>
+            <a:endParaRPr lang="en-US" sz="1700" dirty="0"/>
           </a:p>
         </p:txBody>
       </p:sp>
       <p:sp>
         <p:nvSpPr>
-          <p:cNvPr id="17" name="Text 12"/>
-          <p:cNvSpPr/>
-          <p:nvPr/>
-        </p:nvSpPr>
-        <p:spPr>
-          <a:xfrm>
-            <a:off x="8253984" y="2450592"/>
-            <a:ext cx="3258312" cy="365760"/>
+          <p:cNvPr id="7" name="Text 4"/>
+          <p:cNvSpPr/>
+          <p:nvPr/>
+        </p:nvSpPr>
+        <p:spPr>
+          <a:xfrm>
+            <a:off x="1965960" y="1682496"/>
+            <a:ext cx="9308592" cy="914400"/>
           </a:xfrm>
           <a:prstGeom prst="rect">
             <a:avLst/>
@@ -4855,41 +4321,93 @@
           <a:bodyPr wrap="square" rtlCol="0" anchor="t"/>
           <a:lstStyle/>
           <a:p>
-            <a:pPr algn="ctr" indent="0" marL="0">
+            <a:pPr marL="177800" indent="-177800">
               <a:lnSpc>
-                <a:spcPct val="105000"/>
+                <a:spcPct val="110000"/>
               </a:lnSpc>
-              <a:buNone/>
-            </a:pPr>
-            <a:r>
-              <a:rPr lang="en-US" sz="950" dirty="0">
-                <a:solidFill>
-                  <a:srgbClr val="5B7290"/>
+              <a:spcAft>
+                <a:spcPts val="400"/>
+              </a:spcAft>
+              <a:buSzPct val="100000"/>
+              <a:buChar char="•"/>
+            </a:pPr>
+            <a:r>
+              <a:rPr lang="en-US" sz="1200" dirty="0">
+                <a:solidFill>
+                  <a:srgbClr val="1A2B3C"/>
                 </a:solidFill>
                 <a:latin typeface="Calibri" pitchFamily="34" charset="0"/>
                 <a:ea typeface="Calibri" pitchFamily="34" charset="-122"/>
                 <a:cs typeface="Calibri" pitchFamily="34" charset="-120"/>
               </a:rPr>
-              <a:t>Logistic Regression, Random Forest, MLP</a:t>
-            </a:r>
-            <a:endParaRPr lang="en-US" sz="950" dirty="0"/>
+              <a:t>Thử nghiệm thêm LightGBM/CatBoost và kỹ thuật ensemble stacking nhiều mô hình</a:t>
+            </a:r>
+            <a:endParaRPr lang="en-US" sz="1200" dirty="0"/>
+          </a:p>
+          <a:p>
+            <a:pPr marL="177800" indent="-177800">
+              <a:lnSpc>
+                <a:spcPct val="110000"/>
+              </a:lnSpc>
+              <a:spcAft>
+                <a:spcPts val="400"/>
+              </a:spcAft>
+              <a:buSzPct val="100000"/>
+              <a:buChar char="•"/>
+            </a:pPr>
+            <a:r>
+              <a:rPr lang="en-US" sz="1200" dirty="0">
+                <a:solidFill>
+                  <a:srgbClr val="1A2B3C"/>
+                </a:solidFill>
+                <a:latin typeface="Calibri" pitchFamily="34" charset="0"/>
+                <a:ea typeface="Calibri" pitchFamily="34" charset="-122"/>
+                <a:cs typeface="Calibri" pitchFamily="34" charset="-120"/>
+              </a:rPr>
+              <a:t>Nghiên cứu sâu hơn kỹ thuật xử lý mất cân bằng dữ liệu (SMOTE, cost-sensitive learning) thay vì chỉ class-weight</a:t>
+            </a:r>
+            <a:endParaRPr lang="en-US" sz="1200" dirty="0"/>
+          </a:p>
+          <a:p>
+            <a:pPr marL="177800" indent="-177800">
+              <a:lnSpc>
+                <a:spcPct val="110000"/>
+              </a:lnSpc>
+              <a:spcAft>
+                <a:spcPts val="400"/>
+              </a:spcAft>
+              <a:buSzPct val="100000"/>
+              <a:buChar char="•"/>
+            </a:pPr>
+            <a:r>
+              <a:rPr lang="en-US" sz="1200" dirty="0">
+                <a:solidFill>
+                  <a:srgbClr val="1A2B3C"/>
+                </a:solidFill>
+                <a:latin typeface="Calibri" pitchFamily="34" charset="0"/>
+                <a:ea typeface="Calibri" pitchFamily="34" charset="-122"/>
+                <a:cs typeface="Calibri" pitchFamily="34" charset="-120"/>
+              </a:rPr>
+              <a:t>Kiểm định thống kê định lượng cho công thức priority_score, thay vì chỉ case study định tính</a:t>
+            </a:r>
+            <a:endParaRPr lang="en-US" sz="1200" dirty="0"/>
           </a:p>
         </p:txBody>
       </p:sp>
       <p:sp>
         <p:nvSpPr>
-          <p:cNvPr id="18" name="Shape 13"/>
-          <p:cNvSpPr/>
-          <p:nvPr/>
-        </p:nvSpPr>
-        <p:spPr>
-          <a:xfrm>
-            <a:off x="548640" y="3044952"/>
-            <a:ext cx="3514344" cy="1572768"/>
+          <p:cNvPr id="8" name="Shape 5"/>
+          <p:cNvSpPr/>
+          <p:nvPr/>
+        </p:nvSpPr>
+        <p:spPr>
+          <a:xfrm>
+            <a:off x="548640" y="2862072"/>
+            <a:ext cx="11091672" cy="1536192"/>
           </a:xfrm>
           <a:prstGeom prst="roundRect">
             <a:avLst>
-              <a:gd name="adj" fmla="val 4651"/>
+              <a:gd name="adj" fmla="val 4762"/>
             </a:avLst>
           </a:prstGeom>
           <a:solidFill>
@@ -4897,9 +4415,9 @@
           </a:solidFill>
           <a:ln/>
           <a:effectLst>
-            <a:outerShdw sx="100000" sy="100000" kx="0" ky="0" algn="bl" rotWithShape="0" blurRad="63500" dist="25400" dir="5400000">
+            <a:outerShdw blurRad="76200" dist="25400" dir="5400000" algn="bl" rotWithShape="0">
               <a:srgbClr val="9DB6D6">
-                <a:alpha val="30000"/>
+                <a:alpha val="35000"/>
               </a:srgbClr>
             </a:outerShdw>
           </a:effectLst>
@@ -4907,14 +4425,14 @@
       </p:sp>
       <p:sp>
         <p:nvSpPr>
-          <p:cNvPr id="19" name="Shape 14"/>
-          <p:cNvSpPr/>
-          <p:nvPr/>
-        </p:nvSpPr>
-        <p:spPr>
-          <a:xfrm>
-            <a:off x="2031492" y="3209544"/>
-            <a:ext cx="548640" cy="548640"/>
+          <p:cNvPr id="9" name="Shape 6"/>
+          <p:cNvSpPr/>
+          <p:nvPr/>
+        </p:nvSpPr>
+        <p:spPr>
+          <a:xfrm>
+            <a:off x="868680" y="3241548"/>
+            <a:ext cx="777240" cy="777240"/>
           </a:xfrm>
           <a:prstGeom prst="ellipse">
             <a:avLst/>
@@ -4927,7 +4445,7 @@
       </p:sp>
       <p:pic>
         <p:nvPicPr>
-          <p:cNvPr id="20" name="Image 3" descr="tech_xgboost.png">    </p:cNvPr>
+          <p:cNvPr id="10" name="Image 1" descr="rocket.png"/>
           <p:cNvPicPr>
             <a:picLocks noChangeAspect="1"/>
           </p:cNvPicPr>
@@ -4941,8 +4459,8 @@
         </p:blipFill>
         <p:spPr>
           <a:xfrm>
-            <a:off x="2102815" y="3280867"/>
-            <a:ext cx="405994" cy="405994"/>
+            <a:off x="969721" y="3342589"/>
+            <a:ext cx="575158" cy="575158"/>
           </a:xfrm>
           <a:prstGeom prst="rect">
             <a:avLst/>
@@ -4951,14 +4469,14 @@
       </p:pic>
       <p:sp>
         <p:nvSpPr>
-          <p:cNvPr id="21" name="Text 15"/>
-          <p:cNvSpPr/>
-          <p:nvPr/>
-        </p:nvSpPr>
-        <p:spPr>
-          <a:xfrm>
-            <a:off x="658368" y="3886200"/>
-            <a:ext cx="3294888" cy="347472"/>
+          <p:cNvPr id="11" name="Text 7"/>
+          <p:cNvSpPr/>
+          <p:nvPr/>
+        </p:nvSpPr>
+        <p:spPr>
+          <a:xfrm>
+            <a:off x="1965960" y="3008376"/>
+            <a:ext cx="9308592" cy="365760"/>
           </a:xfrm>
           <a:prstGeom prst="rect">
             <a:avLst/>
@@ -4970,11 +4488,11 @@
           <a:bodyPr wrap="square" rtlCol="0" anchor="ctr"/>
           <a:lstStyle/>
           <a:p>
-            <a:pPr algn="ctr" indent="0" marL="0">
+            <a:pPr marL="0" indent="0">
               <a:buNone/>
             </a:pPr>
             <a:r>
-              <a:rPr lang="en-US" sz="1350" b="1" dirty="0">
+              <a:rPr lang="en-US" sz="1700" b="1" dirty="0">
                 <a:solidFill>
                   <a:srgbClr val="0E2A47"/>
                 </a:solidFill>
@@ -4982,22 +4500,22 @@
                 <a:ea typeface="Cambria" pitchFamily="34" charset="-122"/>
                 <a:cs typeface="Cambria" pitchFamily="34" charset="-120"/>
               </a:rPr>
-              <a:t>XGBoost</a:t>
-            </a:r>
-            <a:endParaRPr lang="en-US" sz="1350" dirty="0"/>
+              <a:t>Ứng dụng thực tế</a:t>
+            </a:r>
+            <a:endParaRPr lang="en-US" sz="1700" dirty="0"/>
           </a:p>
         </p:txBody>
       </p:sp>
       <p:sp>
         <p:nvSpPr>
-          <p:cNvPr id="22" name="Text 16"/>
-          <p:cNvSpPr/>
-          <p:nvPr/>
-        </p:nvSpPr>
-        <p:spPr>
-          <a:xfrm>
-            <a:off x="676656" y="4215384"/>
-            <a:ext cx="3258312" cy="365760"/>
+          <p:cNvPr id="12" name="Text 8"/>
+          <p:cNvSpPr/>
+          <p:nvPr/>
+        </p:nvSpPr>
+        <p:spPr>
+          <a:xfrm>
+            <a:off x="1965960" y="3374136"/>
+            <a:ext cx="9308592" cy="914400"/>
           </a:xfrm>
           <a:prstGeom prst="rect">
             <a:avLst/>
@@ -5009,794 +4527,76 @@
           <a:bodyPr wrap="square" rtlCol="0" anchor="t"/>
           <a:lstStyle/>
           <a:p>
-            <a:pPr algn="ctr" indent="0" marL="0">
+            <a:pPr marL="177800" indent="-177800">
               <a:lnSpc>
-                <a:spcPct val="105000"/>
+                <a:spcPct val="110000"/>
               </a:lnSpc>
-              <a:buNone/>
-            </a:pPr>
-            <a:r>
-              <a:rPr lang="en-US" sz="950" dirty="0">
-                <a:solidFill>
-                  <a:srgbClr val="5B7290"/>
+              <a:spcAft>
+                <a:spcPts val="400"/>
+              </a:spcAft>
+              <a:buSzPct val="100000"/>
+              <a:buChar char="•"/>
+            </a:pPr>
+            <a:r>
+              <a:rPr lang="en-US" sz="1200" dirty="0">
+                <a:solidFill>
+                  <a:srgbClr val="1A2B3C"/>
                 </a:solidFill>
                 <a:latin typeface="Calibri" pitchFamily="34" charset="0"/>
                 <a:ea typeface="Calibri" pitchFamily="34" charset="-122"/>
                 <a:cs typeface="Calibri" pitchFamily="34" charset="-120"/>
               </a:rPr>
-              <a:t>Gradient boosting hiệu năng cao</a:t>
-            </a:r>
-            <a:endParaRPr lang="en-US" sz="950" dirty="0"/>
-          </a:p>
-        </p:txBody>
-      </p:sp>
-      <p:sp>
-        <p:nvSpPr>
-          <p:cNvPr id="23" name="Shape 17"/>
-          <p:cNvSpPr/>
-          <p:nvPr/>
-        </p:nvSpPr>
-        <p:spPr>
-          <a:xfrm>
-            <a:off x="4337304" y="3044952"/>
-            <a:ext cx="3514344" cy="1572768"/>
-          </a:xfrm>
-          <a:prstGeom prst="roundRect">
-            <a:avLst>
-              <a:gd name="adj" fmla="val 4651"/>
-            </a:avLst>
-          </a:prstGeom>
-          <a:solidFill>
-            <a:srgbClr val="EAF2FB"/>
-          </a:solidFill>
-          <a:ln/>
-          <a:effectLst>
-            <a:outerShdw sx="100000" sy="100000" kx="0" ky="0" algn="bl" rotWithShape="0" blurRad="63500" dist="25400" dir="5400000">
-              <a:srgbClr val="9DB6D6">
-                <a:alpha val="30000"/>
-              </a:srgbClr>
-            </a:outerShdw>
-          </a:effectLst>
-        </p:spPr>
-      </p:sp>
-      <p:sp>
-        <p:nvSpPr>
-          <p:cNvPr id="24" name="Shape 18"/>
-          <p:cNvSpPr/>
-          <p:nvPr/>
-        </p:nvSpPr>
-        <p:spPr>
-          <a:xfrm>
-            <a:off x="5820156" y="3209544"/>
-            <a:ext cx="548640" cy="548640"/>
-          </a:xfrm>
-          <a:prstGeom prst="ellipse">
-            <a:avLst/>
-          </a:prstGeom>
-          <a:solidFill>
-            <a:srgbClr val="1F5FA8"/>
-          </a:solidFill>
-          <a:ln/>
-        </p:spPr>
-      </p:sp>
-      <p:pic>
-        <p:nvPicPr>
-          <p:cNvPr id="25" name="Image 4" descr="tech_shap.png">    </p:cNvPr>
-          <p:cNvPicPr>
-            <a:picLocks noChangeAspect="1"/>
-          </p:cNvPicPr>
-          <p:nvPr/>
-        </p:nvPicPr>
-        <p:blipFill>
-          <a:blip r:embed="rId5"/>
-          <a:stretch>
-            <a:fillRect/>
-          </a:stretch>
-        </p:blipFill>
-        <p:spPr>
-          <a:xfrm>
-            <a:off x="5891479" y="3280867"/>
-            <a:ext cx="405994" cy="405994"/>
-          </a:xfrm>
-          <a:prstGeom prst="rect">
-            <a:avLst/>
-          </a:prstGeom>
-        </p:spPr>
-      </p:pic>
-      <p:sp>
-        <p:nvSpPr>
-          <p:cNvPr id="26" name="Text 19"/>
-          <p:cNvSpPr/>
-          <p:nvPr/>
-        </p:nvSpPr>
-        <p:spPr>
-          <a:xfrm>
-            <a:off x="4447032" y="3886200"/>
-            <a:ext cx="3294888" cy="347472"/>
-          </a:xfrm>
-          <a:prstGeom prst="rect">
-            <a:avLst/>
-          </a:prstGeom>
-          <a:noFill/>
-          <a:ln/>
-        </p:spPr>
-        <p:txBody>
-          <a:bodyPr wrap="square" rtlCol="0" anchor="ctr"/>
-          <a:lstStyle/>
-          <a:p>
-            <a:pPr algn="ctr" indent="0" marL="0">
-              <a:buNone/>
-            </a:pPr>
-            <a:r>
-              <a:rPr lang="en-US" sz="1350" b="1" dirty="0">
-                <a:solidFill>
-                  <a:srgbClr val="0E2A47"/>
-                </a:solidFill>
-                <a:latin typeface="Cambria" pitchFamily="34" charset="0"/>
-                <a:ea typeface="Cambria" pitchFamily="34" charset="-122"/>
-                <a:cs typeface="Cambria" pitchFamily="34" charset="-120"/>
-              </a:rPr>
-              <a:t>SHAP</a:t>
-            </a:r>
-            <a:endParaRPr lang="en-US" sz="1350" dirty="0"/>
-          </a:p>
-        </p:txBody>
-      </p:sp>
-      <p:sp>
-        <p:nvSpPr>
-          <p:cNvPr id="27" name="Text 20"/>
-          <p:cNvSpPr/>
-          <p:nvPr/>
-        </p:nvSpPr>
-        <p:spPr>
-          <a:xfrm>
-            <a:off x="4465320" y="4215384"/>
-            <a:ext cx="3258312" cy="365760"/>
-          </a:xfrm>
-          <a:prstGeom prst="rect">
-            <a:avLst/>
-          </a:prstGeom>
-          <a:noFill/>
-          <a:ln/>
-        </p:spPr>
-        <p:txBody>
-          <a:bodyPr wrap="square" rtlCol="0" anchor="t"/>
-          <a:lstStyle/>
-          <a:p>
-            <a:pPr algn="ctr" indent="0" marL="0">
+              <a:t>Xây dựng API/service tích hợp priority_score vào hệ thống CRM thu hồi nợ thực tế</a:t>
+            </a:r>
+            <a:endParaRPr lang="en-US" sz="1200" dirty="0"/>
+          </a:p>
+          <a:p>
+            <a:pPr marL="177800" indent="-177800">
               <a:lnSpc>
-                <a:spcPct val="105000"/>
+                <a:spcPct val="110000"/>
               </a:lnSpc>
-              <a:buNone/>
-            </a:pPr>
-            <a:r>
-              <a:rPr lang="en-US" sz="950" dirty="0">
-                <a:solidFill>
-                  <a:srgbClr val="5B7290"/>
+              <a:spcAft>
+                <a:spcPts val="400"/>
+              </a:spcAft>
+              <a:buSzPct val="100000"/>
+              <a:buChar char="•"/>
+            </a:pPr>
+            <a:r>
+              <a:rPr lang="en-US" sz="1200" dirty="0">
+                <a:solidFill>
+                  <a:srgbClr val="1A2B3C"/>
                 </a:solidFill>
                 <a:latin typeface="Calibri" pitchFamily="34" charset="0"/>
                 <a:ea typeface="Calibri" pitchFamily="34" charset="-122"/>
                 <a:cs typeface="Calibri" pitchFamily="34" charset="-120"/>
               </a:rPr>
-              <a:t>Diễn giải &amp; feature importance</a:t>
-            </a:r>
-            <a:endParaRPr lang="en-US" sz="950" dirty="0"/>
-          </a:p>
-        </p:txBody>
-      </p:sp>
-      <p:sp>
-        <p:nvSpPr>
-          <p:cNvPr id="28" name="Shape 21"/>
-          <p:cNvSpPr/>
-          <p:nvPr/>
-        </p:nvSpPr>
-        <p:spPr>
-          <a:xfrm>
-            <a:off x="8125968" y="3044952"/>
-            <a:ext cx="3514344" cy="1572768"/>
-          </a:xfrm>
-          <a:prstGeom prst="roundRect">
-            <a:avLst>
-              <a:gd name="adj" fmla="val 4651"/>
-            </a:avLst>
-          </a:prstGeom>
-          <a:solidFill>
-            <a:srgbClr val="EAF2FB"/>
-          </a:solidFill>
-          <a:ln/>
-          <a:effectLst>
-            <a:outerShdw sx="100000" sy="100000" kx="0" ky="0" algn="bl" rotWithShape="0" blurRad="63500" dist="25400" dir="5400000">
-              <a:srgbClr val="9DB6D6">
-                <a:alpha val="30000"/>
-              </a:srgbClr>
-            </a:outerShdw>
-          </a:effectLst>
-        </p:spPr>
-      </p:sp>
-      <p:sp>
-        <p:nvSpPr>
-          <p:cNvPr id="29" name="Shape 22"/>
-          <p:cNvSpPr/>
-          <p:nvPr/>
-        </p:nvSpPr>
-        <p:spPr>
-          <a:xfrm>
-            <a:off x="9608820" y="3209544"/>
-            <a:ext cx="548640" cy="548640"/>
-          </a:xfrm>
-          <a:prstGeom prst="ellipse">
-            <a:avLst/>
-          </a:prstGeom>
-          <a:solidFill>
-            <a:srgbClr val="1F5FA8"/>
-          </a:solidFill>
-          <a:ln/>
-        </p:spPr>
-      </p:sp>
-      <p:pic>
-        <p:nvPicPr>
-          <p:cNvPr id="30" name="Image 5" descr="tech_stats.png">    </p:cNvPr>
-          <p:cNvPicPr>
-            <a:picLocks noChangeAspect="1"/>
-          </p:cNvPicPr>
-          <p:nvPr/>
-        </p:nvPicPr>
-        <p:blipFill>
-          <a:blip r:embed="rId6"/>
-          <a:stretch>
-            <a:fillRect/>
-          </a:stretch>
-        </p:blipFill>
-        <p:spPr>
-          <a:xfrm>
-            <a:off x="9680143" y="3280867"/>
-            <a:ext cx="405994" cy="405994"/>
-          </a:xfrm>
-          <a:prstGeom prst="rect">
-            <a:avLst/>
-          </a:prstGeom>
-        </p:spPr>
-      </p:pic>
-      <p:sp>
-        <p:nvSpPr>
-          <p:cNvPr id="31" name="Text 23"/>
-          <p:cNvSpPr/>
-          <p:nvPr/>
-        </p:nvSpPr>
-        <p:spPr>
-          <a:xfrm>
-            <a:off x="8235696" y="3886200"/>
-            <a:ext cx="3294888" cy="347472"/>
-          </a:xfrm>
-          <a:prstGeom prst="rect">
-            <a:avLst/>
-          </a:prstGeom>
-          <a:noFill/>
-          <a:ln/>
-        </p:spPr>
-        <p:txBody>
-          <a:bodyPr wrap="square" rtlCol="0" anchor="ctr"/>
-          <a:lstStyle/>
-          <a:p>
-            <a:pPr algn="ctr" indent="0" marL="0">
-              <a:buNone/>
-            </a:pPr>
-            <a:r>
-              <a:rPr lang="en-US" sz="1350" b="1" dirty="0">
-                <a:solidFill>
-                  <a:srgbClr val="0E2A47"/>
-                </a:solidFill>
-                <a:latin typeface="Cambria" pitchFamily="34" charset="0"/>
-                <a:ea typeface="Cambria" pitchFamily="34" charset="-122"/>
-                <a:cs typeface="Cambria" pitchFamily="34" charset="-120"/>
-              </a:rPr>
-              <a:t>statsmodels</a:t>
-            </a:r>
-            <a:endParaRPr lang="en-US" sz="1350" dirty="0"/>
-          </a:p>
-        </p:txBody>
-      </p:sp>
-      <p:sp>
-        <p:nvSpPr>
-          <p:cNvPr id="32" name="Text 24"/>
-          <p:cNvSpPr/>
-          <p:nvPr/>
-        </p:nvSpPr>
-        <p:spPr>
-          <a:xfrm>
-            <a:off x="8253984" y="4215384"/>
-            <a:ext cx="3258312" cy="365760"/>
-          </a:xfrm>
-          <a:prstGeom prst="rect">
-            <a:avLst/>
-          </a:prstGeom>
-          <a:noFill/>
-          <a:ln/>
-        </p:spPr>
-        <p:txBody>
-          <a:bodyPr wrap="square" rtlCol="0" anchor="t"/>
-          <a:lstStyle/>
-          <a:p>
-            <a:pPr algn="ctr" indent="0" marL="0">
+              <a:t>Dashboard theo dõi danh sách ưu tiên thu hồi nợ theo thời gian thực</a:t>
+            </a:r>
+            <a:endParaRPr lang="en-US" sz="1200" dirty="0"/>
+          </a:p>
+          <a:p>
+            <a:pPr marL="177800" indent="-177800">
               <a:lnSpc>
-                <a:spcPct val="105000"/>
+                <a:spcPct val="110000"/>
               </a:lnSpc>
-              <a:buNone/>
-            </a:pPr>
-            <a:r>
-              <a:rPr lang="en-US" sz="950" dirty="0">
-                <a:solidFill>
-                  <a:srgbClr val="5B7290"/>
+              <a:spcAft>
+                <a:spcPts val="400"/>
+              </a:spcAft>
+              <a:buSzPct val="100000"/>
+              <a:buChar char="•"/>
+            </a:pPr>
+            <a:r>
+              <a:rPr lang="en-US" sz="1200" dirty="0">
+                <a:solidFill>
+                  <a:srgbClr val="1A2B3C"/>
                 </a:solidFill>
                 <a:latin typeface="Calibri" pitchFamily="34" charset="0"/>
                 <a:ea typeface="Calibri" pitchFamily="34" charset="-122"/>
                 <a:cs typeface="Calibri" pitchFamily="34" charset="-120"/>
               </a:rPr>
-              <a:t>Kiểm tra VIF, đa cộng tuyến</a:t>
-            </a:r>
-            <a:endParaRPr lang="en-US" sz="950" dirty="0"/>
-          </a:p>
-        </p:txBody>
-      </p:sp>
-      <p:sp>
-        <p:nvSpPr>
-          <p:cNvPr id="33" name="Shape 25"/>
-          <p:cNvSpPr/>
-          <p:nvPr/>
-        </p:nvSpPr>
-        <p:spPr>
-          <a:xfrm>
-            <a:off x="548640" y="4809744"/>
-            <a:ext cx="3514344" cy="1572768"/>
-          </a:xfrm>
-          <a:prstGeom prst="roundRect">
-            <a:avLst>
-              <a:gd name="adj" fmla="val 4651"/>
-            </a:avLst>
-          </a:prstGeom>
-          <a:solidFill>
-            <a:srgbClr val="EAF2FB"/>
-          </a:solidFill>
-          <a:ln/>
-          <a:effectLst>
-            <a:outerShdw sx="100000" sy="100000" kx="0" ky="0" algn="bl" rotWithShape="0" blurRad="63500" dist="25400" dir="5400000">
-              <a:srgbClr val="9DB6D6">
-                <a:alpha val="30000"/>
-              </a:srgbClr>
-            </a:outerShdw>
-          </a:effectLst>
-        </p:spPr>
-      </p:sp>
-      <p:sp>
-        <p:nvSpPr>
-          <p:cNvPr id="34" name="Shape 26"/>
-          <p:cNvSpPr/>
-          <p:nvPr/>
-        </p:nvSpPr>
-        <p:spPr>
-          <a:xfrm>
-            <a:off x="2031492" y="4974336"/>
-            <a:ext cx="548640" cy="548640"/>
-          </a:xfrm>
-          <a:prstGeom prst="ellipse">
-            <a:avLst/>
-          </a:prstGeom>
-          <a:solidFill>
-            <a:srgbClr val="1F5FA8"/>
-          </a:solidFill>
-          <a:ln/>
-        </p:spPr>
-      </p:sp>
-      <p:pic>
-        <p:nvPicPr>
-          <p:cNvPr id="35" name="Image 6" descr="tech_viz.png">    </p:cNvPr>
-          <p:cNvPicPr>
-            <a:picLocks noChangeAspect="1"/>
-          </p:cNvPicPr>
-          <p:nvPr/>
-        </p:nvPicPr>
-        <p:blipFill>
-          <a:blip r:embed="rId7"/>
-          <a:stretch>
-            <a:fillRect/>
-          </a:stretch>
-        </p:blipFill>
-        <p:spPr>
-          <a:xfrm>
-            <a:off x="2102815" y="5045659"/>
-            <a:ext cx="405994" cy="405994"/>
-          </a:xfrm>
-          <a:prstGeom prst="rect">
-            <a:avLst/>
-          </a:prstGeom>
-        </p:spPr>
-      </p:pic>
-      <p:sp>
-        <p:nvSpPr>
-          <p:cNvPr id="36" name="Text 27"/>
-          <p:cNvSpPr/>
-          <p:nvPr/>
-        </p:nvSpPr>
-        <p:spPr>
-          <a:xfrm>
-            <a:off x="658368" y="5650992"/>
-            <a:ext cx="3294888" cy="347472"/>
-          </a:xfrm>
-          <a:prstGeom prst="rect">
-            <a:avLst/>
-          </a:prstGeom>
-          <a:noFill/>
-          <a:ln/>
-        </p:spPr>
-        <p:txBody>
-          <a:bodyPr wrap="square" rtlCol="0" anchor="ctr"/>
-          <a:lstStyle/>
-          <a:p>
-            <a:pPr algn="ctr" indent="0" marL="0">
-              <a:buNone/>
-            </a:pPr>
-            <a:r>
-              <a:rPr lang="en-US" sz="1350" b="1" dirty="0">
-                <a:solidFill>
-                  <a:srgbClr val="0E2A47"/>
-                </a:solidFill>
-                <a:latin typeface="Cambria" pitchFamily="34" charset="0"/>
-                <a:ea typeface="Cambria" pitchFamily="34" charset="-122"/>
-                <a:cs typeface="Cambria" pitchFamily="34" charset="-120"/>
-              </a:rPr>
-              <a:t>matplotlib &amp; seaborn</a:t>
-            </a:r>
-            <a:endParaRPr lang="en-US" sz="1350" dirty="0"/>
-          </a:p>
-        </p:txBody>
-      </p:sp>
-      <p:sp>
-        <p:nvSpPr>
-          <p:cNvPr id="37" name="Text 28"/>
-          <p:cNvSpPr/>
-          <p:nvPr/>
-        </p:nvSpPr>
-        <p:spPr>
-          <a:xfrm>
-            <a:off x="676656" y="5980176"/>
-            <a:ext cx="3258312" cy="365760"/>
-          </a:xfrm>
-          <a:prstGeom prst="rect">
-            <a:avLst/>
-          </a:prstGeom>
-          <a:noFill/>
-          <a:ln/>
-        </p:spPr>
-        <p:txBody>
-          <a:bodyPr wrap="square" rtlCol="0" anchor="t"/>
-          <a:lstStyle/>
-          <a:p>
-            <a:pPr algn="ctr" indent="0" marL="0">
-              <a:lnSpc>
-                <a:spcPct val="105000"/>
-              </a:lnSpc>
-              <a:buNone/>
-            </a:pPr>
-            <a:r>
-              <a:rPr lang="en-US" sz="950" dirty="0">
-                <a:solidFill>
-                  <a:srgbClr val="5B7290"/>
-                </a:solidFill>
-                <a:latin typeface="Calibri" pitchFamily="34" charset="0"/>
-                <a:ea typeface="Calibri" pitchFamily="34" charset="-122"/>
-                <a:cs typeface="Calibri" pitchFamily="34" charset="-120"/>
-              </a:rPr>
-              <a:t>Trực quan hoá kết quả</a:t>
-            </a:r>
-            <a:endParaRPr lang="en-US" sz="950" dirty="0"/>
-          </a:p>
-        </p:txBody>
-      </p:sp>
-      <p:sp>
-        <p:nvSpPr>
-          <p:cNvPr id="38" name="Shape 29"/>
-          <p:cNvSpPr/>
-          <p:nvPr/>
-        </p:nvSpPr>
-        <p:spPr>
-          <a:xfrm>
-            <a:off x="4337304" y="4809744"/>
-            <a:ext cx="3514344" cy="1572768"/>
-          </a:xfrm>
-          <a:prstGeom prst="roundRect">
-            <a:avLst>
-              <a:gd name="adj" fmla="val 4651"/>
-            </a:avLst>
-          </a:prstGeom>
-          <a:solidFill>
-            <a:srgbClr val="EAF2FB"/>
-          </a:solidFill>
-          <a:ln/>
-          <a:effectLst>
-            <a:outerShdw sx="100000" sy="100000" kx="0" ky="0" algn="bl" rotWithShape="0" blurRad="63500" dist="25400" dir="5400000">
-              <a:srgbClr val="9DB6D6">
-                <a:alpha val="30000"/>
-              </a:srgbClr>
-            </a:outerShdw>
-          </a:effectLst>
-        </p:spPr>
-      </p:sp>
-      <p:sp>
-        <p:nvSpPr>
-          <p:cNvPr id="39" name="Shape 30"/>
-          <p:cNvSpPr/>
-          <p:nvPr/>
-        </p:nvSpPr>
-        <p:spPr>
-          <a:xfrm>
-            <a:off x="5820156" y="4974336"/>
-            <a:ext cx="548640" cy="548640"/>
-          </a:xfrm>
-          <a:prstGeom prst="ellipse">
-            <a:avLst/>
-          </a:prstGeom>
-          <a:solidFill>
-            <a:srgbClr val="1F5FA8"/>
-          </a:solidFill>
-          <a:ln/>
-        </p:spPr>
-      </p:sp>
-      <p:pic>
-        <p:nvPicPr>
-          <p:cNvPr id="40" name="Image 7" descr="tech_jupyter.png">    </p:cNvPr>
-          <p:cNvPicPr>
-            <a:picLocks noChangeAspect="1"/>
-          </p:cNvPicPr>
-          <p:nvPr/>
-        </p:nvPicPr>
-        <p:blipFill>
-          <a:blip r:embed="rId8"/>
-          <a:stretch>
-            <a:fillRect/>
-          </a:stretch>
-        </p:blipFill>
-        <p:spPr>
-          <a:xfrm>
-            <a:off x="5891479" y="5045659"/>
-            <a:ext cx="405994" cy="405994"/>
-          </a:xfrm>
-          <a:prstGeom prst="rect">
-            <a:avLst/>
-          </a:prstGeom>
-        </p:spPr>
-      </p:pic>
-      <p:sp>
-        <p:nvSpPr>
-          <p:cNvPr id="41" name="Text 31"/>
-          <p:cNvSpPr/>
-          <p:nvPr/>
-        </p:nvSpPr>
-        <p:spPr>
-          <a:xfrm>
-            <a:off x="4447032" y="5650992"/>
-            <a:ext cx="3294888" cy="347472"/>
-          </a:xfrm>
-          <a:prstGeom prst="rect">
-            <a:avLst/>
-          </a:prstGeom>
-          <a:noFill/>
-          <a:ln/>
-        </p:spPr>
-        <p:txBody>
-          <a:bodyPr wrap="square" rtlCol="0" anchor="ctr"/>
-          <a:lstStyle/>
-          <a:p>
-            <a:pPr algn="ctr" indent="0" marL="0">
-              <a:buNone/>
-            </a:pPr>
-            <a:r>
-              <a:rPr lang="en-US" sz="1350" b="1" dirty="0">
-                <a:solidFill>
-                  <a:srgbClr val="0E2A47"/>
-                </a:solidFill>
-                <a:latin typeface="Cambria" pitchFamily="34" charset="0"/>
-                <a:ea typeface="Cambria" pitchFamily="34" charset="-122"/>
-                <a:cs typeface="Cambria" pitchFamily="34" charset="-120"/>
-              </a:rPr>
-              <a:t>Jupyter Notebook</a:t>
-            </a:r>
-            <a:endParaRPr lang="en-US" sz="1350" dirty="0"/>
-          </a:p>
-        </p:txBody>
-      </p:sp>
-      <p:sp>
-        <p:nvSpPr>
-          <p:cNvPr id="42" name="Text 32"/>
-          <p:cNvSpPr/>
-          <p:nvPr/>
-        </p:nvSpPr>
-        <p:spPr>
-          <a:xfrm>
-            <a:off x="4465320" y="5980176"/>
-            <a:ext cx="3258312" cy="365760"/>
-          </a:xfrm>
-          <a:prstGeom prst="rect">
-            <a:avLst/>
-          </a:prstGeom>
-          <a:noFill/>
-          <a:ln/>
-        </p:spPr>
-        <p:txBody>
-          <a:bodyPr wrap="square" rtlCol="0" anchor="t"/>
-          <a:lstStyle/>
-          <a:p>
-            <a:pPr algn="ctr" indent="0" marL="0">
-              <a:lnSpc>
-                <a:spcPct val="105000"/>
-              </a:lnSpc>
-              <a:buNone/>
-            </a:pPr>
-            <a:r>
-              <a:rPr lang="en-US" sz="950" dirty="0">
-                <a:solidFill>
-                  <a:srgbClr val="5B7290"/>
-                </a:solidFill>
-                <a:latin typeface="Calibri" pitchFamily="34" charset="0"/>
-                <a:ea typeface="Calibri" pitchFamily="34" charset="-122"/>
-                <a:cs typeface="Calibri" pitchFamily="34" charset="-120"/>
-              </a:rPr>
-              <a:t>Môi trường thực nghiệm</a:t>
-            </a:r>
-            <a:endParaRPr lang="en-US" sz="950" dirty="0"/>
-          </a:p>
-        </p:txBody>
-      </p:sp>
-      <p:sp>
-        <p:nvSpPr>
-          <p:cNvPr id="43" name="Shape 33"/>
-          <p:cNvSpPr/>
-          <p:nvPr/>
-        </p:nvSpPr>
-        <p:spPr>
-          <a:xfrm>
-            <a:off x="8125968" y="4809744"/>
-            <a:ext cx="3514344" cy="1572768"/>
-          </a:xfrm>
-          <a:prstGeom prst="roundRect">
-            <a:avLst>
-              <a:gd name="adj" fmla="val 4651"/>
-            </a:avLst>
-          </a:prstGeom>
-          <a:solidFill>
-            <a:srgbClr val="EAF2FB"/>
-          </a:solidFill>
-          <a:ln/>
-          <a:effectLst>
-            <a:outerShdw sx="100000" sy="100000" kx="0" ky="0" algn="bl" rotWithShape="0" blurRad="63500" dist="25400" dir="5400000">
-              <a:srgbClr val="9DB6D6">
-                <a:alpha val="30000"/>
-              </a:srgbClr>
-            </a:outerShdw>
-          </a:effectLst>
-        </p:spPr>
-      </p:sp>
-      <p:sp>
-        <p:nvSpPr>
-          <p:cNvPr id="44" name="Shape 34"/>
-          <p:cNvSpPr/>
-          <p:nvPr/>
-        </p:nvSpPr>
-        <p:spPr>
-          <a:xfrm>
-            <a:off x="9608820" y="4974336"/>
-            <a:ext cx="548640" cy="548640"/>
-          </a:xfrm>
-          <a:prstGeom prst="ellipse">
-            <a:avLst/>
-          </a:prstGeom>
-          <a:solidFill>
-            <a:srgbClr val="1F5FA8"/>
-          </a:solidFill>
-          <a:ln/>
-        </p:spPr>
-      </p:sp>
-      <p:pic>
-        <p:nvPicPr>
-          <p:cNvPr id="45" name="Image 8" descr="tech_git.png">    </p:cNvPr>
-          <p:cNvPicPr>
-            <a:picLocks noChangeAspect="1"/>
-          </p:cNvPicPr>
-          <p:nvPr/>
-        </p:nvPicPr>
-        <p:blipFill>
-          <a:blip r:embed="rId9"/>
-          <a:stretch>
-            <a:fillRect/>
-          </a:stretch>
-        </p:blipFill>
-        <p:spPr>
-          <a:xfrm>
-            <a:off x="9680143" y="5045659"/>
-            <a:ext cx="405994" cy="405994"/>
-          </a:xfrm>
-          <a:prstGeom prst="rect">
-            <a:avLst/>
-          </a:prstGeom>
-        </p:spPr>
-      </p:pic>
-      <p:sp>
-        <p:nvSpPr>
-          <p:cNvPr id="46" name="Text 35"/>
-          <p:cNvSpPr/>
-          <p:nvPr/>
-        </p:nvSpPr>
-        <p:spPr>
-          <a:xfrm>
-            <a:off x="8235696" y="5650992"/>
-            <a:ext cx="3294888" cy="347472"/>
-          </a:xfrm>
-          <a:prstGeom prst="rect">
-            <a:avLst/>
-          </a:prstGeom>
-          <a:noFill/>
-          <a:ln/>
-        </p:spPr>
-        <p:txBody>
-          <a:bodyPr wrap="square" rtlCol="0" anchor="ctr"/>
-          <a:lstStyle/>
-          <a:p>
-            <a:pPr algn="ctr" indent="0" marL="0">
-              <a:buNone/>
-            </a:pPr>
-            <a:r>
-              <a:rPr lang="en-US" sz="1350" b="1" dirty="0">
-                <a:solidFill>
-                  <a:srgbClr val="0E2A47"/>
-                </a:solidFill>
-                <a:latin typeface="Cambria" pitchFamily="34" charset="0"/>
-                <a:ea typeface="Cambria" pitchFamily="34" charset="-122"/>
-                <a:cs typeface="Cambria" pitchFamily="34" charset="-120"/>
-              </a:rPr>
-              <a:t>Git &amp; GitHub</a:t>
-            </a:r>
-            <a:endParaRPr lang="en-US" sz="1350" dirty="0"/>
-          </a:p>
-        </p:txBody>
-      </p:sp>
-      <p:sp>
-        <p:nvSpPr>
-          <p:cNvPr id="47" name="Text 36"/>
-          <p:cNvSpPr/>
-          <p:nvPr/>
-        </p:nvSpPr>
-        <p:spPr>
-          <a:xfrm>
-            <a:off x="8253984" y="5980176"/>
-            <a:ext cx="3258312" cy="365760"/>
-          </a:xfrm>
-          <a:prstGeom prst="rect">
-            <a:avLst/>
-          </a:prstGeom>
-          <a:noFill/>
-          <a:ln/>
-        </p:spPr>
-        <p:txBody>
-          <a:bodyPr wrap="square" rtlCol="0" anchor="t"/>
-          <a:lstStyle/>
-          <a:p>
-            <a:pPr algn="ctr" indent="0" marL="0">
-              <a:lnSpc>
-                <a:spcPct val="105000"/>
-              </a:lnSpc>
-              <a:buNone/>
-            </a:pPr>
-            <a:r>
-              <a:rPr lang="en-US" sz="950" dirty="0">
-                <a:solidFill>
-                  <a:srgbClr val="5B7290"/>
-                </a:solidFill>
-                <a:latin typeface="Calibri" pitchFamily="34" charset="0"/>
-                <a:ea typeface="Calibri" pitchFamily="34" charset="-122"/>
-                <a:cs typeface="Calibri" pitchFamily="34" charset="-120"/>
-              </a:rPr>
-              <a:t>Quản lý phiên bản &amp; lưu trữ</a:t>
-            </a:r>
-            <a:endParaRPr lang="en-US" sz="950" dirty="0"/>
+              <a:t>A/B testing đo lường hiệu quả thực tế của priority_score trong hoạt động thu hồi nợ</a:t>
+            </a:r>
+            <a:endParaRPr lang="en-US" sz="1200" dirty="0"/>
           </a:p>
         </p:txBody>
       </p:sp>
@@ -6101,4 +4901,299 @@
     </a:ext>
   </a:extLst>
 </a:theme>
+</file>
+
+<file path=ppt/theme/theme2.xml><?xml version="1.0" encoding="utf-8"?>
+<a:theme xmlns:a="http://schemas.openxmlformats.org/drawingml/2006/main" name="Office Theme">
+  <a:themeElements>
+    <a:clrScheme name="Office">
+      <a:dk1>
+        <a:sysClr val="windowText" lastClr="000000"/>
+      </a:dk1>
+      <a:lt1>
+        <a:sysClr val="window" lastClr="FFFFFF"/>
+      </a:lt1>
+      <a:dk2>
+        <a:srgbClr val="44546A"/>
+      </a:dk2>
+      <a:lt2>
+        <a:srgbClr val="E7E6E6"/>
+      </a:lt2>
+      <a:accent1>
+        <a:srgbClr val="4472C4"/>
+      </a:accent1>
+      <a:accent2>
+        <a:srgbClr val="ED7D31"/>
+      </a:accent2>
+      <a:accent3>
+        <a:srgbClr val="A5A5A5"/>
+      </a:accent3>
+      <a:accent4>
+        <a:srgbClr val="FFC000"/>
+      </a:accent4>
+      <a:accent5>
+        <a:srgbClr val="5B9BD5"/>
+      </a:accent5>
+      <a:accent6>
+        <a:srgbClr val="70AD47"/>
+      </a:accent6>
+      <a:hlink>
+        <a:srgbClr val="0563C1"/>
+      </a:hlink>
+      <a:folHlink>
+        <a:srgbClr val="954F72"/>
+      </a:folHlink>
+    </a:clrScheme>
+    <a:fontScheme name="Office">
+      <a:majorFont>
+        <a:latin typeface="Calibri Light" panose="020F0302020204030204"/>
+        <a:ea typeface=""/>
+        <a:cs typeface=""/>
+        <a:font script="Jpan" typeface="游ゴシック Light"/>
+        <a:font script="Hang" typeface="맑은 고딕"/>
+        <a:font script="Hans" typeface="等线 Light"/>
+        <a:font script="Hant" typeface="新細明體"/>
+        <a:font script="Arab" typeface="Times New Roman"/>
+        <a:font script="Hebr" typeface="Times New Roman"/>
+        <a:font script="Thai" typeface="Angsana New"/>
+        <a:font script="Ethi" typeface="Nyala"/>
+        <a:font script="Beng" typeface="Vrinda"/>
+        <a:font script="Gujr" typeface="Shruti"/>
+        <a:font script="Khmr" typeface="MoolBoran"/>
+        <a:font script="Knda" typeface="Tunga"/>
+        <a:font script="Guru" typeface="Raavi"/>
+        <a:font script="Cans" typeface="Euphemia"/>
+        <a:font script="Cher" typeface="Plantagenet Cherokee"/>
+        <a:font script="Yiii" typeface="Microsoft Yi Baiti"/>
+        <a:font script="Tibt" typeface="Microsoft Himalaya"/>
+        <a:font script="Thaa" typeface="MV Boli"/>
+        <a:font script="Deva" typeface="Mangal"/>
+        <a:font script="Telu" typeface="Gautami"/>
+        <a:font script="Taml" typeface="Latha"/>
+        <a:font script="Syrc" typeface="Estrangelo Edessa"/>
+        <a:font script="Orya" typeface="Kalinga"/>
+        <a:font script="Mlym" typeface="Kartika"/>
+        <a:font script="Laoo" typeface="DokChampa"/>
+        <a:font script="Sinh" typeface="Iskoola Pota"/>
+        <a:font script="Mong" typeface="Mongolian Baiti"/>
+        <a:font script="Viet" typeface="Times New Roman"/>
+        <a:font script="Uigh" typeface="Microsoft Uighur"/>
+        <a:font script="Geor" typeface="Sylfaen"/>
+        <a:font script="Armn" typeface="Arial"/>
+        <a:font script="Bugi" typeface="Leelawadee UI"/>
+        <a:font script="Bopo" typeface="Microsoft JhengHei"/>
+        <a:font script="Java" typeface="Javanese Text"/>
+        <a:font script="Lisu" typeface="Segoe UI"/>
+        <a:font script="Mymr" typeface="Myanmar Text"/>
+        <a:font script="Nkoo" typeface="Ebrima"/>
+        <a:font script="Olck" typeface="Nirmala UI"/>
+        <a:font script="Osma" typeface="Ebrima"/>
+        <a:font script="Phag" typeface="Phagspa"/>
+        <a:font script="Syrn" typeface="Estrangelo Edessa"/>
+        <a:font script="Syrj" typeface="Estrangelo Edessa"/>
+        <a:font script="Syre" typeface="Estrangelo Edessa"/>
+        <a:font script="Sora" typeface="Nirmala UI"/>
+        <a:font script="Tale" typeface="Microsoft Tai Le"/>
+        <a:font script="Talu" typeface="Microsoft New Tai Lue"/>
+        <a:font script="Tfng" typeface="Ebrima"/>
+      </a:majorFont>
+      <a:minorFont>
+        <a:latin typeface="Calibri" panose="020F0502020204030204"/>
+        <a:ea typeface=""/>
+        <a:cs typeface=""/>
+        <a:font script="Jpan" typeface="游ゴシック"/>
+        <a:font script="Hang" typeface="맑은 고딕"/>
+        <a:font script="Hans" typeface="等线"/>
+        <a:font script="Hant" typeface="新細明體"/>
+        <a:font script="Arab" typeface="Arial"/>
+        <a:font script="Hebr" typeface="Arial"/>
+        <a:font script="Thai" typeface="Cordia New"/>
+        <a:font script="Ethi" typeface="Nyala"/>
+        <a:font script="Beng" typeface="Vrinda"/>
+        <a:font script="Gujr" typeface="Shruti"/>
+        <a:font script="Khmr" typeface="DaunPenh"/>
+        <a:font script="Knda" typeface="Tunga"/>
+        <a:font script="Guru" typeface="Raavi"/>
+        <a:font script="Cans" typeface="Euphemia"/>
+        <a:font script="Cher" typeface="Plantagenet Cherokee"/>
+        <a:font script="Yiii" typeface="Microsoft Yi Baiti"/>
+        <a:font script="Tibt" typeface="Microsoft Himalaya"/>
+        <a:font script="Thaa" typeface="MV Boli"/>
+        <a:font script="Deva" typeface="Mangal"/>
+        <a:font script="Telu" typeface="Gautami"/>
+        <a:font script="Taml" typeface="Latha"/>
+        <a:font script="Syrc" typeface="Estrangelo Edessa"/>
+        <a:font script="Orya" typeface="Kalinga"/>
+        <a:font script="Mlym" typeface="Kartika"/>
+        <a:font script="Laoo" typeface="DokChampa"/>
+        <a:font script="Sinh" typeface="Iskoola Pota"/>
+        <a:font script="Mong" typeface="Mongolian Baiti"/>
+        <a:font script="Viet" typeface="Arial"/>
+        <a:font script="Uigh" typeface="Microsoft Uighur"/>
+        <a:font script="Geor" typeface="Sylfaen"/>
+        <a:font script="Armn" typeface="Arial"/>
+        <a:font script="Bugi" typeface="Leelawadee UI"/>
+        <a:font script="Bopo" typeface="Microsoft JhengHei"/>
+        <a:font script="Java" typeface="Javanese Text"/>
+        <a:font script="Lisu" typeface="Segoe UI"/>
+        <a:font script="Mymr" typeface="Myanmar Text"/>
+        <a:font script="Nkoo" typeface="Ebrima"/>
+        <a:font script="Olck" typeface="Nirmala UI"/>
+        <a:font script="Osma" typeface="Ebrima"/>
+        <a:font script="Phag" typeface="Phagspa"/>
+        <a:font script="Syrn" typeface="Estrangelo Edessa"/>
+        <a:font script="Syrj" typeface="Estrangelo Edessa"/>
+        <a:font script="Syre" typeface="Estrangelo Edessa"/>
+        <a:font script="Sora" typeface="Nirmala UI"/>
+        <a:font script="Tale" typeface="Microsoft Tai Le"/>
+        <a:font script="Talu" typeface="Microsoft New Tai Lue"/>
+        <a:font script="Tfng" typeface="Ebrima"/>
+      </a:minorFont>
+    </a:fontScheme>
+    <a:fmtScheme name="Office">
+      <a:fillStyleLst>
+        <a:solidFill>
+          <a:schemeClr val="phClr"/>
+        </a:solidFill>
+        <a:gradFill rotWithShape="1">
+          <a:gsLst>
+            <a:gs pos="0">
+              <a:schemeClr val="phClr">
+                <a:lumMod val="110000"/>
+                <a:satMod val="105000"/>
+                <a:tint val="67000"/>
+              </a:schemeClr>
+            </a:gs>
+            <a:gs pos="50000">
+              <a:schemeClr val="phClr">
+                <a:lumMod val="105000"/>
+                <a:satMod val="103000"/>
+                <a:tint val="73000"/>
+              </a:schemeClr>
+            </a:gs>
+            <a:gs pos="100000">
+              <a:schemeClr val="phClr">
+                <a:lumMod val="105000"/>
+                <a:satMod val="109000"/>
+                <a:tint val="81000"/>
+              </a:schemeClr>
+            </a:gs>
+          </a:gsLst>
+          <a:lin ang="5400000" scaled="0"/>
+        </a:gradFill>
+        <a:gradFill rotWithShape="1">
+          <a:gsLst>
+            <a:gs pos="0">
+              <a:schemeClr val="phClr">
+                <a:satMod val="103000"/>
+                <a:lumMod val="102000"/>
+                <a:tint val="94000"/>
+              </a:schemeClr>
+            </a:gs>
+            <a:gs pos="50000">
+              <a:schemeClr val="phClr">
+                <a:satMod val="110000"/>
+                <a:lumMod val="100000"/>
+                <a:shade val="100000"/>
+              </a:schemeClr>
+            </a:gs>
+            <a:gs pos="100000">
+              <a:schemeClr val="phClr">
+                <a:lumMod val="99000"/>
+                <a:satMod val="120000"/>
+                <a:shade val="78000"/>
+              </a:schemeClr>
+            </a:gs>
+          </a:gsLst>
+          <a:lin ang="5400000" scaled="0"/>
+        </a:gradFill>
+      </a:fillStyleLst>
+      <a:lnStyleLst>
+        <a:ln w="6350" cap="flat" cmpd="sng" algn="ctr">
+          <a:solidFill>
+            <a:schemeClr val="phClr"/>
+          </a:solidFill>
+          <a:prstDash val="solid"/>
+          <a:miter lim="800000"/>
+        </a:ln>
+        <a:ln w="12700" cap="flat" cmpd="sng" algn="ctr">
+          <a:solidFill>
+            <a:schemeClr val="phClr"/>
+          </a:solidFill>
+          <a:prstDash val="solid"/>
+          <a:miter lim="800000"/>
+        </a:ln>
+        <a:ln w="19050" cap="flat" cmpd="sng" algn="ctr">
+          <a:solidFill>
+            <a:schemeClr val="phClr"/>
+          </a:solidFill>
+          <a:prstDash val="solid"/>
+          <a:miter lim="800000"/>
+        </a:ln>
+      </a:lnStyleLst>
+      <a:effectStyleLst>
+        <a:effectStyle>
+          <a:effectLst/>
+        </a:effectStyle>
+        <a:effectStyle>
+          <a:effectLst/>
+        </a:effectStyle>
+        <a:effectStyle>
+          <a:effectLst>
+            <a:outerShdw blurRad="57150" dist="19050" dir="5400000" algn="ctr" rotWithShape="0">
+              <a:srgbClr val="000000">
+                <a:alpha val="63000"/>
+              </a:srgbClr>
+            </a:outerShdw>
+          </a:effectLst>
+        </a:effectStyle>
+      </a:effectStyleLst>
+      <a:bgFillStyleLst>
+        <a:solidFill>
+          <a:schemeClr val="phClr"/>
+        </a:solidFill>
+        <a:solidFill>
+          <a:schemeClr val="phClr">
+            <a:tint val="95000"/>
+            <a:satMod val="170000"/>
+          </a:schemeClr>
+        </a:solidFill>
+        <a:gradFill rotWithShape="1">
+          <a:gsLst>
+            <a:gs pos="0">
+              <a:schemeClr val="phClr">
+                <a:tint val="93000"/>
+                <a:satMod val="150000"/>
+                <a:shade val="98000"/>
+                <a:lumMod val="102000"/>
+              </a:schemeClr>
+            </a:gs>
+            <a:gs pos="50000">
+              <a:schemeClr val="phClr">
+                <a:tint val="98000"/>
+                <a:satMod val="130000"/>
+                <a:shade val="90000"/>
+                <a:lumMod val="103000"/>
+              </a:schemeClr>
+            </a:gs>
+            <a:gs pos="100000">
+              <a:schemeClr val="phClr">
+                <a:shade val="63000"/>
+                <a:satMod val="120000"/>
+              </a:schemeClr>
+            </a:gs>
+          </a:gsLst>
+          <a:lin ang="5400000" scaled="0"/>
+        </a:gradFill>
+      </a:bgFillStyleLst>
+    </a:fmtScheme>
+  </a:themeElements>
+  <a:objectDefaults/>
+  <a:extraClrSchemeLst/>
+  <a:extLst>
+    <a:ext uri="{05A4C25C-085E-4340-85A3-A5531E510DB2}">
+      <thm15:themeFamily xmlns:thm15="http://schemas.microsoft.com/office/thememl/2012/main" name="Office Theme" id="{62F939B6-93AF-4DB8-9C6B-D6C7DFDC589F}" vid="{4A3C46E8-61CC-4603-A589-7422A47A8E4A}"/>
+    </a:ext>
+  </a:extLst>
+</a:theme>
 </file>